--- a/arXiv_Presentation.pptx
+++ b/arXiv_Presentation.pptx
@@ -5,21 +5,26 @@
     <p:sldMasterId id="2147483648" r:id="rId1"/>
   </p:sldMasterIdLst>
   <p:notesMasterIdLst>
-    <p:notesMasterId r:id="rId11"/>
+    <p:notesMasterId r:id="rId16"/>
   </p:notesMasterIdLst>
   <p:handoutMasterIdLst>
-    <p:handoutMasterId r:id="rId12"/>
+    <p:handoutMasterId r:id="rId17"/>
   </p:handoutMasterIdLst>
   <p:sldIdLst>
     <p:sldId id="256" r:id="rId2"/>
     <p:sldId id="257" r:id="rId3"/>
     <p:sldId id="258" r:id="rId4"/>
-    <p:sldId id="259" r:id="rId5"/>
-    <p:sldId id="260" r:id="rId6"/>
-    <p:sldId id="261" r:id="rId7"/>
-    <p:sldId id="262" r:id="rId8"/>
-    <p:sldId id="263" r:id="rId9"/>
-    <p:sldId id="264" r:id="rId10"/>
+    <p:sldId id="260" r:id="rId5"/>
+    <p:sldId id="262" r:id="rId6"/>
+    <p:sldId id="263" r:id="rId7"/>
+    <p:sldId id="261" r:id="rId8"/>
+    <p:sldId id="259" r:id="rId9"/>
+    <p:sldId id="265" r:id="rId10"/>
+    <p:sldId id="266" r:id="rId11"/>
+    <p:sldId id="264" r:id="rId12"/>
+    <p:sldId id="268" r:id="rId13"/>
+    <p:sldId id="267" r:id="rId14"/>
+    <p:sldId id="269" r:id="rId15"/>
   </p:sldIdLst>
   <p:sldSz cx="12192000" cy="6858000"/>
   <p:notesSz cx="6858000" cy="9144000"/>
@@ -118,6 +123,11 @@
       </a:defRPr>
     </a:lvl9pPr>
   </p:defaultTextStyle>
+  <p:extLst>
+    <p:ext uri="{EFAFB233-063F-42B5-8137-9DF3F51BA10A}">
+      <p15:sldGuideLst xmlns:p15="http://schemas.microsoft.com/office/powerpoint/2012/main"/>
+    </p:ext>
+  </p:extLst>
 </p:presentation>
 </file>
 
@@ -218,7 +228,7 @@
           <a:p>
             <a:fld id="{C9AC63CA-928D-4F87-BFF4-0C9AAF5D886E}" type="datetimeFigureOut">
               <a:rPr lang="en-US" smtClean="0"/>
-              <a:t>2026-01-20</a:t>
+              <a:t>2026-02-03</a:t>
             </a:fld>
             <a:endParaRPr lang="en-US"/>
           </a:p>
@@ -399,7 +409,7 @@
           <a:p>
             <a:fld id="{57C76DE2-0A2A-4509-BB53-BC12DF9F6EC1}" type="datetimeFigureOut">
               <a:rPr lang="en-US" smtClean="0"/>
-              <a:t>2026-01-20</a:t>
+              <a:t>2026-02-03</a:t>
             </a:fld>
             <a:endParaRPr lang="en-US"/>
           </a:p>
@@ -814,7 +824,7 @@
           <a:p>
             <a:fld id="{400BAF57-FB76-4746-B275-BBE120E15F1F}" type="datetime1">
               <a:rPr lang="en-US" smtClean="0"/>
-              <a:t>2026-01-20</a:t>
+              <a:t>2026-02-03</a:t>
             </a:fld>
             <a:endParaRPr lang="en-US"/>
           </a:p>
@@ -1012,7 +1022,7 @@
           <a:p>
             <a:fld id="{8AF28244-EF44-409A-9E28-DF4D9A5B5744}" type="datetime1">
               <a:rPr lang="en-US" smtClean="0"/>
-              <a:t>2026-01-20</a:t>
+              <a:t>2026-02-03</a:t>
             </a:fld>
             <a:endParaRPr lang="en-US"/>
           </a:p>
@@ -1220,7 +1230,7 @@
           <a:p>
             <a:fld id="{ADEFC4DA-1EC2-4C1E-8D3B-87C53C877169}" type="datetime1">
               <a:rPr lang="en-US" smtClean="0"/>
-              <a:t>2026-01-20</a:t>
+              <a:t>2026-02-03</a:t>
             </a:fld>
             <a:endParaRPr lang="en-US"/>
           </a:p>
@@ -1418,7 +1428,7 @@
           <a:p>
             <a:fld id="{DFF907A7-E271-4778-BBC7-947CE31E83C1}" type="datetime1">
               <a:rPr lang="en-US" smtClean="0"/>
-              <a:t>2026-01-20</a:t>
+              <a:t>2026-02-03</a:t>
             </a:fld>
             <a:endParaRPr lang="en-US"/>
           </a:p>
@@ -1693,7 +1703,7 @@
           <a:p>
             <a:fld id="{C7EA7D2C-CA28-420A-9FCA-A3314E219AD8}" type="datetime1">
               <a:rPr lang="en-US" smtClean="0"/>
-              <a:t>2026-01-20</a:t>
+              <a:t>2026-02-03</a:t>
             </a:fld>
             <a:endParaRPr lang="en-US"/>
           </a:p>
@@ -1958,7 +1968,7 @@
           <a:p>
             <a:fld id="{1B53FAD0-4C18-4A01-A9E9-5C8B5B868DB5}" type="datetime1">
               <a:rPr lang="en-US" smtClean="0"/>
-              <a:t>2026-01-20</a:t>
+              <a:t>2026-02-03</a:t>
             </a:fld>
             <a:endParaRPr lang="en-US"/>
           </a:p>
@@ -2370,7 +2380,7 @@
           <a:p>
             <a:fld id="{8023C090-B2C0-48D9-B96F-0CC76FF45090}" type="datetime1">
               <a:rPr lang="en-US" smtClean="0"/>
-              <a:t>2026-01-20</a:t>
+              <a:t>2026-02-03</a:t>
             </a:fld>
             <a:endParaRPr lang="en-US"/>
           </a:p>
@@ -2511,7 +2521,7 @@
           <a:p>
             <a:fld id="{D5AC7524-14F7-49EA-8EE5-F34E7517E0B2}" type="datetime1">
               <a:rPr lang="en-US" smtClean="0"/>
-              <a:t>2026-01-20</a:t>
+              <a:t>2026-02-03</a:t>
             </a:fld>
             <a:endParaRPr lang="en-US"/>
           </a:p>
@@ -2624,7 +2634,7 @@
           <a:p>
             <a:fld id="{612C8CEB-A0C4-4463-8CE2-B5C215F10B23}" type="datetime1">
               <a:rPr lang="en-US" smtClean="0"/>
-              <a:t>2026-01-20</a:t>
+              <a:t>2026-02-03</a:t>
             </a:fld>
             <a:endParaRPr lang="en-US"/>
           </a:p>
@@ -2935,7 +2945,7 @@
           <a:p>
             <a:fld id="{FF888C9E-A623-4E33-8F05-8457CB25039A}" type="datetime1">
               <a:rPr lang="en-US" smtClean="0"/>
-              <a:t>2026-01-20</a:t>
+              <a:t>2026-02-03</a:t>
             </a:fld>
             <a:endParaRPr lang="en-US"/>
           </a:p>
@@ -3223,7 +3233,7 @@
           <a:p>
             <a:fld id="{EA0BF9E6-6BD3-4399-8D6C-83E78671D086}" type="datetime1">
               <a:rPr lang="en-US" smtClean="0"/>
-              <a:t>2026-01-20</a:t>
+              <a:t>2026-02-03</a:t>
             </a:fld>
             <a:endParaRPr lang="en-US"/>
           </a:p>
@@ -3464,7 +3474,7 @@
           <a:p>
             <a:fld id="{011ABA33-1AAF-4743-AC67-9C40ED5B4260}" type="datetime1">
               <a:rPr lang="en-US" smtClean="0"/>
-              <a:t>2026-01-20</a:t>
+              <a:t>2026-02-03</a:t>
             </a:fld>
             <a:endParaRPr lang="en-US"/>
           </a:p>
@@ -4251,222 +4261,1116 @@
           </a:p>
         </p:txBody>
       </p:sp>
-      <p:grpSp>
-        <p:nvGrpSpPr>
-          <p:cNvPr id="43" name="Group 42">
-            <a:extLst>
-              <a:ext uri="{FF2B5EF4-FFF2-40B4-BE49-F238E27FC236}">
-                <a16:creationId xmlns:a16="http://schemas.microsoft.com/office/drawing/2014/main" id="{FEF952C1-41BF-68CB-CF1E-FE0C176BE174}"/>
-              </a:ext>
-            </a:extLst>
-          </p:cNvPr>
-          <p:cNvGrpSpPr/>
-          <p:nvPr/>
-        </p:nvGrpSpPr>
-        <p:grpSpPr>
-          <a:xfrm>
-            <a:off x="1673159" y="3447854"/>
-            <a:ext cx="9056694" cy="1550710"/>
-            <a:chOff x="638267" y="3276334"/>
-            <a:chExt cx="11125869" cy="1905000"/>
-          </a:xfrm>
-        </p:grpSpPr>
-        <p:pic>
-          <p:nvPicPr>
-            <p:cNvPr id="33" name="Graphic 32">
-              <a:extLst>
-                <a:ext uri="{FF2B5EF4-FFF2-40B4-BE49-F238E27FC236}">
-                  <a16:creationId xmlns:a16="http://schemas.microsoft.com/office/drawing/2014/main" id="{B8AE3314-8E0A-561E-B54E-C5A69AA29001}"/>
-                </a:ext>
-              </a:extLst>
-            </p:cNvPr>
-            <p:cNvPicPr>
-              <a:picLocks noChangeAspect="1"/>
-            </p:cNvPicPr>
-            <p:nvPr/>
-          </p:nvPicPr>
-          <p:blipFill>
-            <a:blip r:embed="rId3">
-              <a:extLst>
-                <a:ext uri="{96DAC541-7B7A-43D3-8B79-37D633B846F1}">
-                  <asvg:svgBlip xmlns:asvg="http://schemas.microsoft.com/office/drawing/2016/SVG/main" r:embed="rId4"/>
-                </a:ext>
-              </a:extLst>
-            </a:blip>
-            <a:stretch>
-              <a:fillRect/>
-            </a:stretch>
-          </p:blipFill>
-          <p:spPr>
-            <a:xfrm>
-              <a:off x="638267" y="3725089"/>
-              <a:ext cx="681684" cy="1007489"/>
-            </a:xfrm>
-            <a:prstGeom prst="rect">
-              <a:avLst/>
-            </a:prstGeom>
-          </p:spPr>
-        </p:pic>
-        <p:pic>
-          <p:nvPicPr>
-            <p:cNvPr id="1026" name="Picture 2">
-              <a:extLst>
-                <a:ext uri="{FF2B5EF4-FFF2-40B4-BE49-F238E27FC236}">
-                  <a16:creationId xmlns:a16="http://schemas.microsoft.com/office/drawing/2014/main" id="{EB7D9BF6-84EC-4CAF-9151-00BC8F39CC31}"/>
-                </a:ext>
-              </a:extLst>
-            </p:cNvPr>
-            <p:cNvPicPr>
-              <a:picLocks noChangeAspect="1" noChangeArrowheads="1"/>
-            </p:cNvPicPr>
-            <p:nvPr/>
-          </p:nvPicPr>
-          <p:blipFill>
-            <a:blip r:embed="rId5">
-              <a:extLst>
-                <a:ext uri="{28A0092B-C50C-407E-A947-70E740481C1C}">
-                  <a14:useLocalDpi xmlns:a14="http://schemas.microsoft.com/office/drawing/2010/main" val="0"/>
-                </a:ext>
-              </a:extLst>
-            </a:blip>
-            <a:srcRect/>
-            <a:stretch>
-              <a:fillRect/>
-            </a:stretch>
-          </p:blipFill>
-          <p:spPr bwMode="auto">
-            <a:xfrm>
-              <a:off x="1864086" y="3725089"/>
-              <a:ext cx="2172093" cy="917709"/>
-            </a:xfrm>
-            <a:prstGeom prst="rect">
-              <a:avLst/>
-            </a:prstGeom>
-            <a:noFill/>
-            <a:extLst>
-              <a:ext uri="{909E8E84-426E-40DD-AFC4-6F175D3DCCD1}">
-                <a14:hiddenFill xmlns:a14="http://schemas.microsoft.com/office/drawing/2010/main">
-                  <a:solidFill>
-                    <a:srgbClr val="FFFFFF"/>
-                  </a:solidFill>
-                </a14:hiddenFill>
-              </a:ext>
-            </a:extLst>
-          </p:spPr>
-        </p:pic>
-        <p:pic>
-          <p:nvPicPr>
-            <p:cNvPr id="38" name="Graphic 37">
-              <a:extLst>
-                <a:ext uri="{FF2B5EF4-FFF2-40B4-BE49-F238E27FC236}">
-                  <a16:creationId xmlns:a16="http://schemas.microsoft.com/office/drawing/2014/main" id="{8CAB2DEE-A5A8-77E5-C8A7-4E7DEAE5BDD1}"/>
-                </a:ext>
-              </a:extLst>
-            </p:cNvPr>
-            <p:cNvPicPr>
-              <a:picLocks noChangeAspect="1"/>
-            </p:cNvPicPr>
-            <p:nvPr/>
-          </p:nvPicPr>
-          <p:blipFill>
-            <a:blip r:embed="rId6">
-              <a:extLst>
-                <a:ext uri="{96DAC541-7B7A-43D3-8B79-37D633B846F1}">
-                  <asvg:svgBlip xmlns:asvg="http://schemas.microsoft.com/office/drawing/2016/SVG/main" r:embed="rId7"/>
-                </a:ext>
-              </a:extLst>
-            </a:blip>
-            <a:stretch>
-              <a:fillRect/>
-            </a:stretch>
-          </p:blipFill>
-          <p:spPr>
-            <a:xfrm>
-              <a:off x="4580314" y="3725090"/>
-              <a:ext cx="1491277" cy="917709"/>
-            </a:xfrm>
-            <a:prstGeom prst="rect">
-              <a:avLst/>
-            </a:prstGeom>
-          </p:spPr>
-        </p:pic>
-        <p:pic>
-          <p:nvPicPr>
-            <p:cNvPr id="40" name="Graphic 39">
-              <a:extLst>
-                <a:ext uri="{FF2B5EF4-FFF2-40B4-BE49-F238E27FC236}">
-                  <a16:creationId xmlns:a16="http://schemas.microsoft.com/office/drawing/2014/main" id="{CB204324-F84B-81ED-C042-1CDCE12AD3EF}"/>
-                </a:ext>
-              </a:extLst>
-            </p:cNvPr>
-            <p:cNvPicPr>
-              <a:picLocks noChangeAspect="1"/>
-            </p:cNvPicPr>
-            <p:nvPr/>
-          </p:nvPicPr>
-          <p:blipFill>
-            <a:blip r:embed="rId8">
-              <a:extLst>
-                <a:ext uri="{96DAC541-7B7A-43D3-8B79-37D633B846F1}">
-                  <asvg:svgBlip xmlns:asvg="http://schemas.microsoft.com/office/drawing/2016/SVG/main" r:embed="rId9"/>
-                </a:ext>
-              </a:extLst>
-            </a:blip>
-            <a:stretch>
-              <a:fillRect/>
-            </a:stretch>
-          </p:blipFill>
-          <p:spPr>
-            <a:xfrm>
-              <a:off x="6615726" y="3276334"/>
-              <a:ext cx="1905000" cy="1905000"/>
-            </a:xfrm>
-            <a:prstGeom prst="rect">
-              <a:avLst/>
-            </a:prstGeom>
-          </p:spPr>
-        </p:pic>
-        <p:pic>
-          <p:nvPicPr>
-            <p:cNvPr id="42" name="Picture 41">
-              <a:extLst>
-                <a:ext uri="{FF2B5EF4-FFF2-40B4-BE49-F238E27FC236}">
-                  <a16:creationId xmlns:a16="http://schemas.microsoft.com/office/drawing/2014/main" id="{3C548992-1F6F-F1D4-5E4D-C17EDC51B2FF}"/>
-                </a:ext>
-              </a:extLst>
-            </p:cNvPr>
-            <p:cNvPicPr>
-              <a:picLocks noChangeAspect="1"/>
-            </p:cNvPicPr>
-            <p:nvPr/>
-          </p:nvPicPr>
-          <p:blipFill>
-            <a:blip r:embed="rId10">
-              <a:extLst>
-                <a:ext uri="{28A0092B-C50C-407E-A947-70E740481C1C}">
-                  <a14:useLocalDpi xmlns:a14="http://schemas.microsoft.com/office/drawing/2010/main" val="0"/>
-                </a:ext>
-              </a:extLst>
-            </a:blip>
-            <a:stretch>
-              <a:fillRect/>
-            </a:stretch>
-          </p:blipFill>
-          <p:spPr>
-            <a:xfrm>
-              <a:off x="9064861" y="3429000"/>
-              <a:ext cx="2699275" cy="1578970"/>
-            </a:xfrm>
-            <a:prstGeom prst="rect">
-              <a:avLst/>
-            </a:prstGeom>
-          </p:spPr>
-        </p:pic>
-      </p:grpSp>
     </p:spTree>
     <p:extLst>
       <p:ext uri="{BB962C8B-B14F-4D97-AF65-F5344CB8AC3E}">
         <p14:creationId xmlns:p14="http://schemas.microsoft.com/office/powerpoint/2010/main" val="2420725952"/>
+      </p:ext>
+    </p:extLst>
+  </p:cSld>
+  <p:clrMapOvr>
+    <a:masterClrMapping/>
+  </p:clrMapOvr>
+</p:sld>
+</file>
+
+<file path=ppt/slides/slide10.xml><?xml version="1.0" encoding="utf-8"?>
+<p:sld xmlns:a="http://schemas.openxmlformats.org/drawingml/2006/main" xmlns:r="http://schemas.openxmlformats.org/officeDocument/2006/relationships" xmlns:p="http://schemas.openxmlformats.org/presentationml/2006/main">
+  <p:cSld>
+    <p:spTree>
+      <p:nvGrpSpPr>
+        <p:cNvPr id="1" name="">
+          <a:extLst>
+            <a:ext uri="{FF2B5EF4-FFF2-40B4-BE49-F238E27FC236}">
+              <a16:creationId xmlns:a16="http://schemas.microsoft.com/office/drawing/2014/main" id="{80AC4CDF-76FC-CDD3-9256-B27182C00DCE}"/>
+            </a:ext>
+          </a:extLst>
+        </p:cNvPr>
+        <p:cNvGrpSpPr/>
+        <p:nvPr/>
+      </p:nvGrpSpPr>
+      <p:grpSpPr>
+        <a:xfrm>
+          <a:off x="0" y="0"/>
+          <a:ext cx="0" cy="0"/>
+          <a:chOff x="0" y="0"/>
+          <a:chExt cx="0" cy="0"/>
+        </a:xfrm>
+      </p:grpSpPr>
+      <p:sp>
+        <p:nvSpPr>
+          <p:cNvPr id="9" name="Rectangle 8">
+            <a:extLst>
+              <a:ext uri="{FF2B5EF4-FFF2-40B4-BE49-F238E27FC236}">
+                <a16:creationId xmlns:a16="http://schemas.microsoft.com/office/drawing/2014/main" id="{CBCB5BBE-E985-CE6A-2A61-F27482795358}"/>
+              </a:ext>
+            </a:extLst>
+          </p:cNvPr>
+          <p:cNvSpPr/>
+          <p:nvPr/>
+        </p:nvSpPr>
+        <p:spPr>
+          <a:xfrm>
+            <a:off x="0" y="0"/>
+            <a:ext cx="12192000" cy="688157"/>
+          </a:xfrm>
+          <a:prstGeom prst="rect">
+            <a:avLst/>
+          </a:prstGeom>
+          <a:solidFill>
+            <a:srgbClr val="222222"/>
+          </a:solidFill>
+          <a:ln>
+            <a:noFill/>
+          </a:ln>
+        </p:spPr>
+        <p:style>
+          <a:lnRef idx="2">
+            <a:schemeClr val="accent1">
+              <a:shade val="15000"/>
+            </a:schemeClr>
+          </a:lnRef>
+          <a:fillRef idx="1">
+            <a:schemeClr val="accent1"/>
+          </a:fillRef>
+          <a:effectRef idx="0">
+            <a:schemeClr val="accent1"/>
+          </a:effectRef>
+          <a:fontRef idx="minor">
+            <a:schemeClr val="lt1"/>
+          </a:fontRef>
+        </p:style>
+        <p:txBody>
+          <a:bodyPr rtlCol="0" anchor="ctr"/>
+          <a:lstStyle/>
+          <a:p>
+            <a:pPr algn="ctr"/>
+            <a:r>
+              <a:rPr lang="ru-RU" sz="3200" dirty="0"/>
+              <a:t>Валидация </a:t>
+            </a:r>
+            <a:r>
+              <a:rPr lang="en-US" sz="3200" dirty="0"/>
+              <a:t>RAG</a:t>
+            </a:r>
+            <a:r>
+              <a:rPr lang="ru-RU" sz="3200" dirty="0"/>
+              <a:t>-системы</a:t>
+            </a:r>
+            <a:endParaRPr lang="en-US" sz="3200" dirty="0"/>
+          </a:p>
+        </p:txBody>
+      </p:sp>
+      <p:sp>
+        <p:nvSpPr>
+          <p:cNvPr id="12" name="Rectangle: Rounded Corners 11">
+            <a:extLst>
+              <a:ext uri="{FF2B5EF4-FFF2-40B4-BE49-F238E27FC236}">
+                <a16:creationId xmlns:a16="http://schemas.microsoft.com/office/drawing/2014/main" id="{01FC1B19-DC9F-7753-626D-44964B15829B}"/>
+              </a:ext>
+            </a:extLst>
+          </p:cNvPr>
+          <p:cNvSpPr/>
+          <p:nvPr/>
+        </p:nvSpPr>
+        <p:spPr>
+          <a:xfrm>
+            <a:off x="145606" y="142562"/>
+            <a:ext cx="403034" cy="403034"/>
+          </a:xfrm>
+          <a:prstGeom prst="roundRect">
+            <a:avLst/>
+          </a:prstGeom>
+          <a:solidFill>
+            <a:schemeClr val="bg1"/>
+          </a:solidFill>
+          <a:ln>
+            <a:noFill/>
+          </a:ln>
+        </p:spPr>
+        <p:style>
+          <a:lnRef idx="2">
+            <a:schemeClr val="accent1">
+              <a:shade val="15000"/>
+            </a:schemeClr>
+          </a:lnRef>
+          <a:fillRef idx="1">
+            <a:schemeClr val="accent1"/>
+          </a:fillRef>
+          <a:effectRef idx="0">
+            <a:schemeClr val="accent1"/>
+          </a:effectRef>
+          <a:fontRef idx="minor">
+            <a:schemeClr val="lt1"/>
+          </a:fontRef>
+        </p:style>
+        <p:txBody>
+          <a:bodyPr rtlCol="0" anchor="ctr"/>
+          <a:lstStyle/>
+          <a:p>
+            <a:pPr algn="ctr"/>
+            <a:r>
+              <a:rPr lang="ru-RU" dirty="0"/>
+              <a:t>ё</a:t>
+            </a:r>
+            <a:endParaRPr lang="en-US" dirty="0"/>
+          </a:p>
+        </p:txBody>
+      </p:sp>
+      <p:sp>
+        <p:nvSpPr>
+          <p:cNvPr id="2" name="Slide Number Placeholder 1">
+            <a:extLst>
+              <a:ext uri="{FF2B5EF4-FFF2-40B4-BE49-F238E27FC236}">
+                <a16:creationId xmlns:a16="http://schemas.microsoft.com/office/drawing/2014/main" id="{53AAC85D-B76A-3BD3-B9CD-95C21A755FBE}"/>
+              </a:ext>
+            </a:extLst>
+          </p:cNvPr>
+          <p:cNvSpPr>
+            <a:spLocks noGrp="1"/>
+          </p:cNvSpPr>
+          <p:nvPr>
+            <p:ph type="sldNum" sz="quarter" idx="12"/>
+          </p:nvPr>
+        </p:nvSpPr>
+        <p:spPr>
+          <a:xfrm>
+            <a:off x="145606" y="142562"/>
+            <a:ext cx="403034" cy="403034"/>
+          </a:xfrm>
+        </p:spPr>
+        <p:txBody>
+          <a:bodyPr/>
+          <a:lstStyle/>
+          <a:p>
+            <a:pPr algn="ctr"/>
+            <a:fld id="{E484B7D4-87AC-4334-8015-F9E0E28AB063}" type="slidenum">
+              <a:rPr lang="en-US" sz="1600" smtClean="0">
+                <a:solidFill>
+                  <a:srgbClr val="222222"/>
+                </a:solidFill>
+              </a:rPr>
+              <a:pPr algn="ctr"/>
+              <a:t>10</a:t>
+            </a:fld>
+            <a:endParaRPr lang="en-US" sz="1600" dirty="0">
+              <a:solidFill>
+                <a:srgbClr val="222222"/>
+              </a:solidFill>
+            </a:endParaRPr>
+          </a:p>
+        </p:txBody>
+      </p:sp>
+      <p:sp>
+        <p:nvSpPr>
+          <p:cNvPr id="4" name="TextBox 3">
+            <a:extLst>
+              <a:ext uri="{FF2B5EF4-FFF2-40B4-BE49-F238E27FC236}">
+                <a16:creationId xmlns:a16="http://schemas.microsoft.com/office/drawing/2014/main" id="{0CD790CC-1038-CAF7-454C-069BE0086DD3}"/>
+              </a:ext>
+            </a:extLst>
+          </p:cNvPr>
+          <p:cNvSpPr txBox="1"/>
+          <p:nvPr/>
+        </p:nvSpPr>
+        <p:spPr>
+          <a:xfrm>
+            <a:off x="8639175" y="6239946"/>
+            <a:ext cx="3362325" cy="369332"/>
+          </a:xfrm>
+          <a:prstGeom prst="rect">
+            <a:avLst/>
+          </a:prstGeom>
+          <a:noFill/>
+        </p:spPr>
+        <p:txBody>
+          <a:bodyPr wrap="square">
+            <a:spAutoFit/>
+          </a:bodyPr>
+          <a:lstStyle/>
+          <a:p>
+            <a:r>
+              <a:rPr lang="en-US" dirty="0">
+                <a:solidFill>
+                  <a:schemeClr val="tx1">
+                    <a:lumMod val="50000"/>
+                    <a:lumOff val="50000"/>
+                  </a:schemeClr>
+                </a:solidFill>
+              </a:rPr>
+              <a:t>https://arxiv.org/abs/2309.15217</a:t>
+            </a:r>
+          </a:p>
+        </p:txBody>
+      </p:sp>
+    </p:spTree>
+    <p:extLst>
+      <p:ext uri="{BB962C8B-B14F-4D97-AF65-F5344CB8AC3E}">
+        <p14:creationId xmlns:p14="http://schemas.microsoft.com/office/powerpoint/2010/main" val="415348669"/>
+      </p:ext>
+    </p:extLst>
+  </p:cSld>
+  <p:clrMapOvr>
+    <a:masterClrMapping/>
+  </p:clrMapOvr>
+</p:sld>
+</file>
+
+<file path=ppt/slides/slide11.xml><?xml version="1.0" encoding="utf-8"?>
+<p:sld xmlns:a="http://schemas.openxmlformats.org/drawingml/2006/main" xmlns:r="http://schemas.openxmlformats.org/officeDocument/2006/relationships" xmlns:p="http://schemas.openxmlformats.org/presentationml/2006/main">
+  <p:cSld>
+    <p:spTree>
+      <p:nvGrpSpPr>
+        <p:cNvPr id="1" name="">
+          <a:extLst>
+            <a:ext uri="{FF2B5EF4-FFF2-40B4-BE49-F238E27FC236}">
+              <a16:creationId xmlns:a16="http://schemas.microsoft.com/office/drawing/2014/main" id="{DDA6A203-9264-AF20-8F10-100D9FD4A7AA}"/>
+            </a:ext>
+          </a:extLst>
+        </p:cNvPr>
+        <p:cNvGrpSpPr/>
+        <p:nvPr/>
+      </p:nvGrpSpPr>
+      <p:grpSpPr>
+        <a:xfrm>
+          <a:off x="0" y="0"/>
+          <a:ext cx="0" cy="0"/>
+          <a:chOff x="0" y="0"/>
+          <a:chExt cx="0" cy="0"/>
+        </a:xfrm>
+      </p:grpSpPr>
+      <p:sp>
+        <p:nvSpPr>
+          <p:cNvPr id="9" name="Rectangle 8">
+            <a:extLst>
+              <a:ext uri="{FF2B5EF4-FFF2-40B4-BE49-F238E27FC236}">
+                <a16:creationId xmlns:a16="http://schemas.microsoft.com/office/drawing/2014/main" id="{12F6115D-FF31-D268-91C5-9CC6D99A86BF}"/>
+              </a:ext>
+            </a:extLst>
+          </p:cNvPr>
+          <p:cNvSpPr/>
+          <p:nvPr/>
+        </p:nvSpPr>
+        <p:spPr>
+          <a:xfrm>
+            <a:off x="0" y="0"/>
+            <a:ext cx="12192000" cy="688157"/>
+          </a:xfrm>
+          <a:prstGeom prst="rect">
+            <a:avLst/>
+          </a:prstGeom>
+          <a:solidFill>
+            <a:srgbClr val="222222"/>
+          </a:solidFill>
+          <a:ln>
+            <a:noFill/>
+          </a:ln>
+        </p:spPr>
+        <p:style>
+          <a:lnRef idx="2">
+            <a:schemeClr val="accent1">
+              <a:shade val="15000"/>
+            </a:schemeClr>
+          </a:lnRef>
+          <a:fillRef idx="1">
+            <a:schemeClr val="accent1"/>
+          </a:fillRef>
+          <a:effectRef idx="0">
+            <a:schemeClr val="accent1"/>
+          </a:effectRef>
+          <a:fontRef idx="minor">
+            <a:schemeClr val="lt1"/>
+          </a:fontRef>
+        </p:style>
+        <p:txBody>
+          <a:bodyPr rtlCol="0" anchor="ctr"/>
+          <a:lstStyle/>
+          <a:p>
+            <a:pPr algn="ctr"/>
+            <a:r>
+              <a:rPr lang="ru-RU" sz="3200" dirty="0"/>
+              <a:t>Следующие шаги</a:t>
+            </a:r>
+            <a:endParaRPr lang="en-US" sz="3200" dirty="0"/>
+          </a:p>
+        </p:txBody>
+      </p:sp>
+      <p:sp>
+        <p:nvSpPr>
+          <p:cNvPr id="12" name="Rectangle: Rounded Corners 11">
+            <a:extLst>
+              <a:ext uri="{FF2B5EF4-FFF2-40B4-BE49-F238E27FC236}">
+                <a16:creationId xmlns:a16="http://schemas.microsoft.com/office/drawing/2014/main" id="{7634B364-113E-9A12-7B2B-C53CB05D4B93}"/>
+              </a:ext>
+            </a:extLst>
+          </p:cNvPr>
+          <p:cNvSpPr/>
+          <p:nvPr/>
+        </p:nvSpPr>
+        <p:spPr>
+          <a:xfrm>
+            <a:off x="145606" y="142562"/>
+            <a:ext cx="403034" cy="403034"/>
+          </a:xfrm>
+          <a:prstGeom prst="roundRect">
+            <a:avLst/>
+          </a:prstGeom>
+          <a:solidFill>
+            <a:schemeClr val="bg1"/>
+          </a:solidFill>
+          <a:ln>
+            <a:noFill/>
+          </a:ln>
+        </p:spPr>
+        <p:style>
+          <a:lnRef idx="2">
+            <a:schemeClr val="accent1">
+              <a:shade val="15000"/>
+            </a:schemeClr>
+          </a:lnRef>
+          <a:fillRef idx="1">
+            <a:schemeClr val="accent1"/>
+          </a:fillRef>
+          <a:effectRef idx="0">
+            <a:schemeClr val="accent1"/>
+          </a:effectRef>
+          <a:fontRef idx="minor">
+            <a:schemeClr val="lt1"/>
+          </a:fontRef>
+        </p:style>
+        <p:txBody>
+          <a:bodyPr rtlCol="0" anchor="ctr"/>
+          <a:lstStyle/>
+          <a:p>
+            <a:pPr algn="ctr"/>
+            <a:r>
+              <a:rPr lang="ru-RU" dirty="0"/>
+              <a:t>ё</a:t>
+            </a:r>
+            <a:endParaRPr lang="en-US" dirty="0"/>
+          </a:p>
+        </p:txBody>
+      </p:sp>
+      <p:sp>
+        <p:nvSpPr>
+          <p:cNvPr id="2" name="Slide Number Placeholder 1">
+            <a:extLst>
+              <a:ext uri="{FF2B5EF4-FFF2-40B4-BE49-F238E27FC236}">
+                <a16:creationId xmlns:a16="http://schemas.microsoft.com/office/drawing/2014/main" id="{01272CEE-C0F2-F2FE-07D8-5D653DC41D58}"/>
+              </a:ext>
+            </a:extLst>
+          </p:cNvPr>
+          <p:cNvSpPr>
+            <a:spLocks noGrp="1"/>
+          </p:cNvSpPr>
+          <p:nvPr>
+            <p:ph type="sldNum" sz="quarter" idx="12"/>
+          </p:nvPr>
+        </p:nvSpPr>
+        <p:spPr>
+          <a:xfrm>
+            <a:off x="145606" y="142562"/>
+            <a:ext cx="403034" cy="403034"/>
+          </a:xfrm>
+        </p:spPr>
+        <p:txBody>
+          <a:bodyPr/>
+          <a:lstStyle/>
+          <a:p>
+            <a:pPr algn="ctr"/>
+            <a:fld id="{E484B7D4-87AC-4334-8015-F9E0E28AB063}" type="slidenum">
+              <a:rPr lang="en-US" sz="1600" smtClean="0">
+                <a:solidFill>
+                  <a:srgbClr val="222222"/>
+                </a:solidFill>
+              </a:rPr>
+              <a:pPr algn="ctr"/>
+              <a:t>11</a:t>
+            </a:fld>
+            <a:endParaRPr lang="en-US" sz="1600" dirty="0">
+              <a:solidFill>
+                <a:srgbClr val="222222"/>
+              </a:solidFill>
+            </a:endParaRPr>
+          </a:p>
+        </p:txBody>
+      </p:sp>
+      <p:sp>
+        <p:nvSpPr>
+          <p:cNvPr id="3" name="TextBox 2">
+            <a:extLst>
+              <a:ext uri="{FF2B5EF4-FFF2-40B4-BE49-F238E27FC236}">
+                <a16:creationId xmlns:a16="http://schemas.microsoft.com/office/drawing/2014/main" id="{80B175DA-E71E-7EDB-E893-51EBCF5FB037}"/>
+              </a:ext>
+            </a:extLst>
+          </p:cNvPr>
+          <p:cNvSpPr txBox="1"/>
+          <p:nvPr/>
+        </p:nvSpPr>
+        <p:spPr>
+          <a:xfrm>
+            <a:off x="2838698" y="2644170"/>
+            <a:ext cx="6514604" cy="2308324"/>
+          </a:xfrm>
+          <a:prstGeom prst="rect">
+            <a:avLst/>
+          </a:prstGeom>
+          <a:noFill/>
+        </p:spPr>
+        <p:txBody>
+          <a:bodyPr wrap="none" rtlCol="0">
+            <a:spAutoFit/>
+          </a:bodyPr>
+          <a:lstStyle/>
+          <a:p>
+            <a:pPr marL="285750" indent="-285750">
+              <a:buFont typeface="Arial" panose="020B0604020202020204" pitchFamily="34" charset="0"/>
+              <a:buChar char="•"/>
+            </a:pPr>
+            <a:r>
+              <a:rPr lang="en-US" sz="2400" dirty="0"/>
+              <a:t>Dense + Sparse Vector search (Cosine + BM25)</a:t>
+            </a:r>
+          </a:p>
+          <a:p>
+            <a:pPr marL="285750" indent="-285750">
+              <a:buFont typeface="Arial" panose="020B0604020202020204" pitchFamily="34" charset="0"/>
+              <a:buChar char="•"/>
+            </a:pPr>
+            <a:r>
+              <a:rPr lang="ru-RU" sz="2400" dirty="0"/>
+              <a:t>Ранжирование результатов поиска (</a:t>
+            </a:r>
+            <a:r>
+              <a:rPr lang="ru-RU" sz="2400" dirty="0" err="1"/>
+              <a:t>Реранкер</a:t>
+            </a:r>
+            <a:r>
+              <a:rPr lang="ru-RU" sz="2400" dirty="0"/>
+              <a:t>)</a:t>
+            </a:r>
+          </a:p>
+          <a:p>
+            <a:pPr marL="285750" indent="-285750">
+              <a:buFont typeface="Arial" panose="020B0604020202020204" pitchFamily="34" charset="0"/>
+              <a:buChar char="•"/>
+            </a:pPr>
+            <a:r>
+              <a:rPr lang="ru-RU" sz="2400" dirty="0"/>
+              <a:t>Совершенствование эталонного датасета</a:t>
+            </a:r>
+          </a:p>
+          <a:p>
+            <a:pPr marL="285750" indent="-285750">
+              <a:buFont typeface="Arial" panose="020B0604020202020204" pitchFamily="34" charset="0"/>
+              <a:buChar char="•"/>
+            </a:pPr>
+            <a:r>
+              <a:rPr lang="ru-RU" sz="2400" dirty="0"/>
+              <a:t>Использовать </a:t>
+            </a:r>
+            <a:r>
+              <a:rPr lang="en-US" sz="2400" dirty="0"/>
+              <a:t>Reasoning </a:t>
+            </a:r>
+            <a:r>
+              <a:rPr lang="ru-RU" sz="2400" dirty="0"/>
+              <a:t>генератор</a:t>
+            </a:r>
+          </a:p>
+          <a:p>
+            <a:pPr marL="285750" indent="-285750">
+              <a:buFont typeface="Arial" panose="020B0604020202020204" pitchFamily="34" charset="0"/>
+              <a:buChar char="•"/>
+            </a:pPr>
+            <a:r>
+              <a:rPr lang="en-US" sz="2400" dirty="0"/>
+              <a:t>Graph RAG</a:t>
+            </a:r>
+          </a:p>
+          <a:p>
+            <a:pPr marL="285750" indent="-285750">
+              <a:buFont typeface="Arial" panose="020B0604020202020204" pitchFamily="34" charset="0"/>
+              <a:buChar char="•"/>
+            </a:pPr>
+            <a:r>
+              <a:rPr lang="ru-RU" sz="2400" dirty="0"/>
+              <a:t>Создать диалоговый формат общения с </a:t>
+            </a:r>
+            <a:r>
+              <a:rPr lang="en-US" sz="2400" dirty="0"/>
+              <a:t>RAG</a:t>
+            </a:r>
+          </a:p>
+        </p:txBody>
+      </p:sp>
+    </p:spTree>
+    <p:extLst>
+      <p:ext uri="{BB962C8B-B14F-4D97-AF65-F5344CB8AC3E}">
+        <p14:creationId xmlns:p14="http://schemas.microsoft.com/office/powerpoint/2010/main" val="1733612834"/>
+      </p:ext>
+    </p:extLst>
+  </p:cSld>
+  <p:clrMapOvr>
+    <a:masterClrMapping/>
+  </p:clrMapOvr>
+</p:sld>
+</file>
+
+<file path=ppt/slides/slide12.xml><?xml version="1.0" encoding="utf-8"?>
+<p:sld xmlns:a="http://schemas.openxmlformats.org/drawingml/2006/main" xmlns:r="http://schemas.openxmlformats.org/officeDocument/2006/relationships" xmlns:p="http://schemas.openxmlformats.org/presentationml/2006/main">
+  <p:cSld>
+    <p:spTree>
+      <p:nvGrpSpPr>
+        <p:cNvPr id="1" name="">
+          <a:extLst>
+            <a:ext uri="{FF2B5EF4-FFF2-40B4-BE49-F238E27FC236}">
+              <a16:creationId xmlns:a16="http://schemas.microsoft.com/office/drawing/2014/main" id="{16643BF1-ECA3-4E2B-1838-95469C69291B}"/>
+            </a:ext>
+          </a:extLst>
+        </p:cNvPr>
+        <p:cNvGrpSpPr/>
+        <p:nvPr/>
+      </p:nvGrpSpPr>
+      <p:grpSpPr>
+        <a:xfrm>
+          <a:off x="0" y="0"/>
+          <a:ext cx="0" cy="0"/>
+          <a:chOff x="0" y="0"/>
+          <a:chExt cx="0" cy="0"/>
+        </a:xfrm>
+      </p:grpSpPr>
+      <p:sp>
+        <p:nvSpPr>
+          <p:cNvPr id="9" name="Rectangle 8">
+            <a:extLst>
+              <a:ext uri="{FF2B5EF4-FFF2-40B4-BE49-F238E27FC236}">
+                <a16:creationId xmlns:a16="http://schemas.microsoft.com/office/drawing/2014/main" id="{605A2787-45F5-5869-0A1E-2BBB6ADB1689}"/>
+              </a:ext>
+            </a:extLst>
+          </p:cNvPr>
+          <p:cNvSpPr/>
+          <p:nvPr/>
+        </p:nvSpPr>
+        <p:spPr>
+          <a:xfrm>
+            <a:off x="0" y="0"/>
+            <a:ext cx="12192000" cy="688157"/>
+          </a:xfrm>
+          <a:prstGeom prst="rect">
+            <a:avLst/>
+          </a:prstGeom>
+          <a:solidFill>
+            <a:srgbClr val="222222"/>
+          </a:solidFill>
+          <a:ln>
+            <a:noFill/>
+          </a:ln>
+        </p:spPr>
+        <p:style>
+          <a:lnRef idx="2">
+            <a:schemeClr val="accent1">
+              <a:shade val="15000"/>
+            </a:schemeClr>
+          </a:lnRef>
+          <a:fillRef idx="1">
+            <a:schemeClr val="accent1"/>
+          </a:fillRef>
+          <a:effectRef idx="0">
+            <a:schemeClr val="accent1"/>
+          </a:effectRef>
+          <a:fontRef idx="minor">
+            <a:schemeClr val="lt1"/>
+          </a:fontRef>
+        </p:style>
+        <p:txBody>
+          <a:bodyPr rtlCol="0" anchor="ctr"/>
+          <a:lstStyle/>
+          <a:p>
+            <a:pPr algn="ctr"/>
+            <a:endParaRPr lang="en-US"/>
+          </a:p>
+        </p:txBody>
+      </p:sp>
+      <p:sp>
+        <p:nvSpPr>
+          <p:cNvPr id="12" name="Rectangle: Rounded Corners 11">
+            <a:extLst>
+              <a:ext uri="{FF2B5EF4-FFF2-40B4-BE49-F238E27FC236}">
+                <a16:creationId xmlns:a16="http://schemas.microsoft.com/office/drawing/2014/main" id="{65001F3F-E764-2343-4AD9-8B3F243F27A4}"/>
+              </a:ext>
+            </a:extLst>
+          </p:cNvPr>
+          <p:cNvSpPr/>
+          <p:nvPr/>
+        </p:nvSpPr>
+        <p:spPr>
+          <a:xfrm>
+            <a:off x="145606" y="142562"/>
+            <a:ext cx="403034" cy="403034"/>
+          </a:xfrm>
+          <a:prstGeom prst="roundRect">
+            <a:avLst/>
+          </a:prstGeom>
+          <a:solidFill>
+            <a:schemeClr val="bg1"/>
+          </a:solidFill>
+          <a:ln>
+            <a:noFill/>
+          </a:ln>
+        </p:spPr>
+        <p:style>
+          <a:lnRef idx="2">
+            <a:schemeClr val="accent1">
+              <a:shade val="15000"/>
+            </a:schemeClr>
+          </a:lnRef>
+          <a:fillRef idx="1">
+            <a:schemeClr val="accent1"/>
+          </a:fillRef>
+          <a:effectRef idx="0">
+            <a:schemeClr val="accent1"/>
+          </a:effectRef>
+          <a:fontRef idx="minor">
+            <a:schemeClr val="lt1"/>
+          </a:fontRef>
+        </p:style>
+        <p:txBody>
+          <a:bodyPr rtlCol="0" anchor="ctr"/>
+          <a:lstStyle/>
+          <a:p>
+            <a:pPr algn="ctr"/>
+            <a:r>
+              <a:rPr lang="ru-RU" dirty="0"/>
+              <a:t>ё</a:t>
+            </a:r>
+            <a:endParaRPr lang="en-US" dirty="0"/>
+          </a:p>
+        </p:txBody>
+      </p:sp>
+      <p:sp>
+        <p:nvSpPr>
+          <p:cNvPr id="2" name="Slide Number Placeholder 1">
+            <a:extLst>
+              <a:ext uri="{FF2B5EF4-FFF2-40B4-BE49-F238E27FC236}">
+                <a16:creationId xmlns:a16="http://schemas.microsoft.com/office/drawing/2014/main" id="{E16CECF1-510F-9004-9844-9D5804315CD9}"/>
+              </a:ext>
+            </a:extLst>
+          </p:cNvPr>
+          <p:cNvSpPr>
+            <a:spLocks noGrp="1"/>
+          </p:cNvSpPr>
+          <p:nvPr>
+            <p:ph type="sldNum" sz="quarter" idx="12"/>
+          </p:nvPr>
+        </p:nvSpPr>
+        <p:spPr>
+          <a:xfrm>
+            <a:off x="145606" y="142562"/>
+            <a:ext cx="403034" cy="403034"/>
+          </a:xfrm>
+        </p:spPr>
+        <p:txBody>
+          <a:bodyPr/>
+          <a:lstStyle/>
+          <a:p>
+            <a:pPr algn="ctr"/>
+            <a:fld id="{97CD60CB-F48F-49AC-AD8C-779680B82E32}" type="slidenum">
+              <a:rPr lang="en-US" sz="1600" smtClean="0">
+                <a:solidFill>
+                  <a:srgbClr val="222222"/>
+                </a:solidFill>
+              </a:rPr>
+              <a:t>12</a:t>
+            </a:fld>
+            <a:endParaRPr lang="en-US" sz="1600" dirty="0">
+              <a:solidFill>
+                <a:srgbClr val="222222"/>
+              </a:solidFill>
+            </a:endParaRPr>
+          </a:p>
+        </p:txBody>
+      </p:sp>
+    </p:spTree>
+    <p:extLst>
+      <p:ext uri="{BB962C8B-B14F-4D97-AF65-F5344CB8AC3E}">
+        <p14:creationId xmlns:p14="http://schemas.microsoft.com/office/powerpoint/2010/main" val="1673173374"/>
+      </p:ext>
+    </p:extLst>
+  </p:cSld>
+  <p:clrMapOvr>
+    <a:masterClrMapping/>
+  </p:clrMapOvr>
+</p:sld>
+</file>
+
+<file path=ppt/slides/slide13.xml><?xml version="1.0" encoding="utf-8"?>
+<p:sld xmlns:a="http://schemas.openxmlformats.org/drawingml/2006/main" xmlns:r="http://schemas.openxmlformats.org/officeDocument/2006/relationships" xmlns:p="http://schemas.openxmlformats.org/presentationml/2006/main">
+  <p:cSld>
+    <p:spTree>
+      <p:nvGrpSpPr>
+        <p:cNvPr id="1" name="">
+          <a:extLst>
+            <a:ext uri="{FF2B5EF4-FFF2-40B4-BE49-F238E27FC236}">
+              <a16:creationId xmlns:a16="http://schemas.microsoft.com/office/drawing/2014/main" id="{2E53E0CD-462C-3CCF-C8AA-F4F192DCE71C}"/>
+            </a:ext>
+          </a:extLst>
+        </p:cNvPr>
+        <p:cNvGrpSpPr/>
+        <p:nvPr/>
+      </p:nvGrpSpPr>
+      <p:grpSpPr>
+        <a:xfrm>
+          <a:off x="0" y="0"/>
+          <a:ext cx="0" cy="0"/>
+          <a:chOff x="0" y="0"/>
+          <a:chExt cx="0" cy="0"/>
+        </a:xfrm>
+      </p:grpSpPr>
+      <p:sp>
+        <p:nvSpPr>
+          <p:cNvPr id="9" name="Rectangle 8">
+            <a:extLst>
+              <a:ext uri="{FF2B5EF4-FFF2-40B4-BE49-F238E27FC236}">
+                <a16:creationId xmlns:a16="http://schemas.microsoft.com/office/drawing/2014/main" id="{49C49142-9917-E81C-3271-2ACB52E8D236}"/>
+              </a:ext>
+            </a:extLst>
+          </p:cNvPr>
+          <p:cNvSpPr/>
+          <p:nvPr/>
+        </p:nvSpPr>
+        <p:spPr>
+          <a:xfrm>
+            <a:off x="0" y="0"/>
+            <a:ext cx="12192000" cy="688157"/>
+          </a:xfrm>
+          <a:prstGeom prst="rect">
+            <a:avLst/>
+          </a:prstGeom>
+          <a:solidFill>
+            <a:srgbClr val="222222"/>
+          </a:solidFill>
+          <a:ln>
+            <a:noFill/>
+          </a:ln>
+        </p:spPr>
+        <p:style>
+          <a:lnRef idx="2">
+            <a:schemeClr val="accent1">
+              <a:shade val="15000"/>
+            </a:schemeClr>
+          </a:lnRef>
+          <a:fillRef idx="1">
+            <a:schemeClr val="accent1"/>
+          </a:fillRef>
+          <a:effectRef idx="0">
+            <a:schemeClr val="accent1"/>
+          </a:effectRef>
+          <a:fontRef idx="minor">
+            <a:schemeClr val="lt1"/>
+          </a:fontRef>
+        </p:style>
+        <p:txBody>
+          <a:bodyPr rtlCol="0" anchor="ctr"/>
+          <a:lstStyle/>
+          <a:p>
+            <a:pPr algn="ctr"/>
+            <a:endParaRPr lang="en-US"/>
+          </a:p>
+        </p:txBody>
+      </p:sp>
+      <p:sp>
+        <p:nvSpPr>
+          <p:cNvPr id="12" name="Rectangle: Rounded Corners 11">
+            <a:extLst>
+              <a:ext uri="{FF2B5EF4-FFF2-40B4-BE49-F238E27FC236}">
+                <a16:creationId xmlns:a16="http://schemas.microsoft.com/office/drawing/2014/main" id="{99BDA964-E049-F286-9554-DFC1C9905A4C}"/>
+              </a:ext>
+            </a:extLst>
+          </p:cNvPr>
+          <p:cNvSpPr/>
+          <p:nvPr/>
+        </p:nvSpPr>
+        <p:spPr>
+          <a:xfrm>
+            <a:off x="145606" y="142562"/>
+            <a:ext cx="403034" cy="403034"/>
+          </a:xfrm>
+          <a:prstGeom prst="roundRect">
+            <a:avLst/>
+          </a:prstGeom>
+          <a:solidFill>
+            <a:schemeClr val="bg1"/>
+          </a:solidFill>
+          <a:ln>
+            <a:noFill/>
+          </a:ln>
+        </p:spPr>
+        <p:style>
+          <a:lnRef idx="2">
+            <a:schemeClr val="accent1">
+              <a:shade val="15000"/>
+            </a:schemeClr>
+          </a:lnRef>
+          <a:fillRef idx="1">
+            <a:schemeClr val="accent1"/>
+          </a:fillRef>
+          <a:effectRef idx="0">
+            <a:schemeClr val="accent1"/>
+          </a:effectRef>
+          <a:fontRef idx="minor">
+            <a:schemeClr val="lt1"/>
+          </a:fontRef>
+        </p:style>
+        <p:txBody>
+          <a:bodyPr rtlCol="0" anchor="ctr"/>
+          <a:lstStyle/>
+          <a:p>
+            <a:pPr algn="ctr"/>
+            <a:r>
+              <a:rPr lang="ru-RU" dirty="0"/>
+              <a:t>ё</a:t>
+            </a:r>
+            <a:endParaRPr lang="en-US" dirty="0"/>
+          </a:p>
+        </p:txBody>
+      </p:sp>
+      <p:sp>
+        <p:nvSpPr>
+          <p:cNvPr id="2" name="Slide Number Placeholder 1">
+            <a:extLst>
+              <a:ext uri="{FF2B5EF4-FFF2-40B4-BE49-F238E27FC236}">
+                <a16:creationId xmlns:a16="http://schemas.microsoft.com/office/drawing/2014/main" id="{204B3FCC-87D4-BBB2-60A3-E6A82CCF760F}"/>
+              </a:ext>
+            </a:extLst>
+          </p:cNvPr>
+          <p:cNvSpPr>
+            <a:spLocks noGrp="1"/>
+          </p:cNvSpPr>
+          <p:nvPr>
+            <p:ph type="sldNum" sz="quarter" idx="12"/>
+          </p:nvPr>
+        </p:nvSpPr>
+        <p:spPr>
+          <a:xfrm>
+            <a:off x="145606" y="142562"/>
+            <a:ext cx="403034" cy="403034"/>
+          </a:xfrm>
+        </p:spPr>
+        <p:txBody>
+          <a:bodyPr/>
+          <a:lstStyle/>
+          <a:p>
+            <a:pPr algn="ctr"/>
+            <a:fld id="{E484B7D4-87AC-4334-8015-F9E0E28AB063}" type="slidenum">
+              <a:rPr lang="en-US" sz="1600" smtClean="0">
+                <a:solidFill>
+                  <a:srgbClr val="222222"/>
+                </a:solidFill>
+              </a:rPr>
+              <a:pPr algn="ctr"/>
+              <a:t>13</a:t>
+            </a:fld>
+            <a:endParaRPr lang="en-US" sz="1600" dirty="0">
+              <a:solidFill>
+                <a:srgbClr val="222222"/>
+              </a:solidFill>
+            </a:endParaRPr>
+          </a:p>
+        </p:txBody>
+      </p:sp>
+    </p:spTree>
+    <p:extLst>
+      <p:ext uri="{BB962C8B-B14F-4D97-AF65-F5344CB8AC3E}">
+        <p14:creationId xmlns:p14="http://schemas.microsoft.com/office/powerpoint/2010/main" val="3365393624"/>
+      </p:ext>
+    </p:extLst>
+  </p:cSld>
+  <p:clrMapOvr>
+    <a:masterClrMapping/>
+  </p:clrMapOvr>
+</p:sld>
+</file>
+
+<file path=ppt/slides/slide14.xml><?xml version="1.0" encoding="utf-8"?>
+<p:sld xmlns:a="http://schemas.openxmlformats.org/drawingml/2006/main" xmlns:r="http://schemas.openxmlformats.org/officeDocument/2006/relationships" xmlns:p="http://schemas.openxmlformats.org/presentationml/2006/main">
+  <p:cSld>
+    <p:spTree>
+      <p:nvGrpSpPr>
+        <p:cNvPr id="1" name="">
+          <a:extLst>
+            <a:ext uri="{FF2B5EF4-FFF2-40B4-BE49-F238E27FC236}">
+              <a16:creationId xmlns:a16="http://schemas.microsoft.com/office/drawing/2014/main" id="{029C50A6-356E-6634-5B19-DD29FDB85E88}"/>
+            </a:ext>
+          </a:extLst>
+        </p:cNvPr>
+        <p:cNvGrpSpPr/>
+        <p:nvPr/>
+      </p:nvGrpSpPr>
+      <p:grpSpPr>
+        <a:xfrm>
+          <a:off x="0" y="0"/>
+          <a:ext cx="0" cy="0"/>
+          <a:chOff x="0" y="0"/>
+          <a:chExt cx="0" cy="0"/>
+        </a:xfrm>
+      </p:grpSpPr>
+      <p:sp>
+        <p:nvSpPr>
+          <p:cNvPr id="9" name="Rectangle 8">
+            <a:extLst>
+              <a:ext uri="{FF2B5EF4-FFF2-40B4-BE49-F238E27FC236}">
+                <a16:creationId xmlns:a16="http://schemas.microsoft.com/office/drawing/2014/main" id="{CEEF65E5-F77A-33C2-CBB4-DCC4CD24B1A0}"/>
+              </a:ext>
+            </a:extLst>
+          </p:cNvPr>
+          <p:cNvSpPr/>
+          <p:nvPr/>
+        </p:nvSpPr>
+        <p:spPr>
+          <a:xfrm>
+            <a:off x="0" y="0"/>
+            <a:ext cx="12192000" cy="688157"/>
+          </a:xfrm>
+          <a:prstGeom prst="rect">
+            <a:avLst/>
+          </a:prstGeom>
+          <a:solidFill>
+            <a:srgbClr val="222222"/>
+          </a:solidFill>
+          <a:ln>
+            <a:noFill/>
+          </a:ln>
+        </p:spPr>
+        <p:style>
+          <a:lnRef idx="2">
+            <a:schemeClr val="accent1">
+              <a:shade val="15000"/>
+            </a:schemeClr>
+          </a:lnRef>
+          <a:fillRef idx="1">
+            <a:schemeClr val="accent1"/>
+          </a:fillRef>
+          <a:effectRef idx="0">
+            <a:schemeClr val="accent1"/>
+          </a:effectRef>
+          <a:fontRef idx="minor">
+            <a:schemeClr val="lt1"/>
+          </a:fontRef>
+        </p:style>
+        <p:txBody>
+          <a:bodyPr rtlCol="0" anchor="ctr"/>
+          <a:lstStyle/>
+          <a:p>
+            <a:pPr algn="ctr"/>
+            <a:endParaRPr lang="en-US"/>
+          </a:p>
+        </p:txBody>
+      </p:sp>
+      <p:sp>
+        <p:nvSpPr>
+          <p:cNvPr id="12" name="Rectangle: Rounded Corners 11">
+            <a:extLst>
+              <a:ext uri="{FF2B5EF4-FFF2-40B4-BE49-F238E27FC236}">
+                <a16:creationId xmlns:a16="http://schemas.microsoft.com/office/drawing/2014/main" id="{F1E85E81-D835-1244-4CD2-DC547CC563D6}"/>
+              </a:ext>
+            </a:extLst>
+          </p:cNvPr>
+          <p:cNvSpPr/>
+          <p:nvPr/>
+        </p:nvSpPr>
+        <p:spPr>
+          <a:xfrm>
+            <a:off x="145606" y="142562"/>
+            <a:ext cx="403034" cy="403034"/>
+          </a:xfrm>
+          <a:prstGeom prst="roundRect">
+            <a:avLst/>
+          </a:prstGeom>
+          <a:solidFill>
+            <a:schemeClr val="bg1"/>
+          </a:solidFill>
+          <a:ln>
+            <a:noFill/>
+          </a:ln>
+        </p:spPr>
+        <p:style>
+          <a:lnRef idx="2">
+            <a:schemeClr val="accent1">
+              <a:shade val="15000"/>
+            </a:schemeClr>
+          </a:lnRef>
+          <a:fillRef idx="1">
+            <a:schemeClr val="accent1"/>
+          </a:fillRef>
+          <a:effectRef idx="0">
+            <a:schemeClr val="accent1"/>
+          </a:effectRef>
+          <a:fontRef idx="minor">
+            <a:schemeClr val="lt1"/>
+          </a:fontRef>
+        </p:style>
+        <p:txBody>
+          <a:bodyPr rtlCol="0" anchor="ctr"/>
+          <a:lstStyle/>
+          <a:p>
+            <a:pPr algn="ctr"/>
+            <a:r>
+              <a:rPr lang="ru-RU" dirty="0"/>
+              <a:t>ё</a:t>
+            </a:r>
+            <a:endParaRPr lang="en-US" dirty="0"/>
+          </a:p>
+        </p:txBody>
+      </p:sp>
+      <p:sp>
+        <p:nvSpPr>
+          <p:cNvPr id="2" name="Slide Number Placeholder 1">
+            <a:extLst>
+              <a:ext uri="{FF2B5EF4-FFF2-40B4-BE49-F238E27FC236}">
+                <a16:creationId xmlns:a16="http://schemas.microsoft.com/office/drawing/2014/main" id="{EF98F5EE-AE6F-8BA2-3F8F-E984D52F4B95}"/>
+              </a:ext>
+            </a:extLst>
+          </p:cNvPr>
+          <p:cNvSpPr>
+            <a:spLocks noGrp="1"/>
+          </p:cNvSpPr>
+          <p:nvPr>
+            <p:ph type="sldNum" sz="quarter" idx="12"/>
+          </p:nvPr>
+        </p:nvSpPr>
+        <p:spPr>
+          <a:xfrm>
+            <a:off x="145606" y="142562"/>
+            <a:ext cx="403034" cy="403034"/>
+          </a:xfrm>
+        </p:spPr>
+        <p:txBody>
+          <a:bodyPr/>
+          <a:lstStyle/>
+          <a:p>
+            <a:pPr algn="ctr"/>
+            <a:fld id="{E484B7D4-87AC-4334-8015-F9E0E28AB063}" type="slidenum">
+              <a:rPr lang="en-US" sz="1600" smtClean="0">
+                <a:solidFill>
+                  <a:srgbClr val="222222"/>
+                </a:solidFill>
+              </a:rPr>
+              <a:pPr algn="ctr"/>
+              <a:t>14</a:t>
+            </a:fld>
+            <a:endParaRPr lang="en-US" sz="1600" dirty="0">
+              <a:solidFill>
+                <a:srgbClr val="222222"/>
+              </a:solidFill>
+            </a:endParaRPr>
+          </a:p>
+        </p:txBody>
+      </p:sp>
+    </p:spTree>
+    <p:extLst>
+      <p:ext uri="{BB962C8B-B14F-4D97-AF65-F5344CB8AC3E}">
+        <p14:creationId xmlns:p14="http://schemas.microsoft.com/office/powerpoint/2010/main" val="3230809163"/>
       </p:ext>
     </p:extLst>
   </p:cSld>
@@ -4549,7 +5453,7 @@
             <a:pPr algn="ctr"/>
             <a:r>
               <a:rPr lang="ru-RU" sz="3200" dirty="0"/>
-              <a:t>Вступление</a:t>
+              <a:t>Зачем всё это?</a:t>
             </a:r>
             <a:endParaRPr lang="en-US" sz="3200" dirty="0"/>
           </a:p>
@@ -4739,7 +5643,11 @@
           <a:lstStyle/>
           <a:p>
             <a:pPr algn="ctr"/>
-            <a:endParaRPr lang="en-US"/>
+            <a:r>
+              <a:rPr lang="ru-RU" sz="3200" dirty="0"/>
+              <a:t>Какие данные используем?</a:t>
+            </a:r>
+            <a:endParaRPr lang="en-US" sz="3200" dirty="0"/>
           </a:p>
         </p:txBody>
       </p:sp>
@@ -4857,6 +5765,774 @@
 </file>
 
 <file path=ppt/slides/slide4.xml><?xml version="1.0" encoding="utf-8"?>
+<p:sld xmlns:a="http://schemas.openxmlformats.org/drawingml/2006/main" xmlns:r="http://schemas.openxmlformats.org/officeDocument/2006/relationships" xmlns:p="http://schemas.openxmlformats.org/presentationml/2006/main">
+  <p:cSld>
+    <p:spTree>
+      <p:nvGrpSpPr>
+        <p:cNvPr id="1" name="">
+          <a:extLst>
+            <a:ext uri="{FF2B5EF4-FFF2-40B4-BE49-F238E27FC236}">
+              <a16:creationId xmlns:a16="http://schemas.microsoft.com/office/drawing/2014/main" id="{1D6278FD-C71C-5992-580B-06313E58D26A}"/>
+            </a:ext>
+          </a:extLst>
+        </p:cNvPr>
+        <p:cNvGrpSpPr/>
+        <p:nvPr/>
+      </p:nvGrpSpPr>
+      <p:grpSpPr>
+        <a:xfrm>
+          <a:off x="0" y="0"/>
+          <a:ext cx="0" cy="0"/>
+          <a:chOff x="0" y="0"/>
+          <a:chExt cx="0" cy="0"/>
+        </a:xfrm>
+      </p:grpSpPr>
+      <p:sp>
+        <p:nvSpPr>
+          <p:cNvPr id="9" name="Rectangle 8">
+            <a:extLst>
+              <a:ext uri="{FF2B5EF4-FFF2-40B4-BE49-F238E27FC236}">
+                <a16:creationId xmlns:a16="http://schemas.microsoft.com/office/drawing/2014/main" id="{41E7DB20-0EF9-2E79-BF52-304B8C08D058}"/>
+              </a:ext>
+            </a:extLst>
+          </p:cNvPr>
+          <p:cNvSpPr/>
+          <p:nvPr/>
+        </p:nvSpPr>
+        <p:spPr>
+          <a:xfrm>
+            <a:off x="0" y="0"/>
+            <a:ext cx="12192000" cy="688157"/>
+          </a:xfrm>
+          <a:prstGeom prst="rect">
+            <a:avLst/>
+          </a:prstGeom>
+          <a:solidFill>
+            <a:srgbClr val="222222"/>
+          </a:solidFill>
+          <a:ln>
+            <a:noFill/>
+          </a:ln>
+        </p:spPr>
+        <p:style>
+          <a:lnRef idx="2">
+            <a:schemeClr val="accent1">
+              <a:shade val="15000"/>
+            </a:schemeClr>
+          </a:lnRef>
+          <a:fillRef idx="1">
+            <a:schemeClr val="accent1"/>
+          </a:fillRef>
+          <a:effectRef idx="0">
+            <a:schemeClr val="accent1"/>
+          </a:effectRef>
+          <a:fontRef idx="minor">
+            <a:schemeClr val="lt1"/>
+          </a:fontRef>
+        </p:style>
+        <p:txBody>
+          <a:bodyPr rtlCol="0" anchor="ctr"/>
+          <a:lstStyle/>
+          <a:p>
+            <a:pPr algn="ctr"/>
+            <a:r>
+              <a:rPr lang="ru-RU" sz="3200" dirty="0"/>
+              <a:t>Предобработка данных</a:t>
+            </a:r>
+            <a:endParaRPr lang="en-US" sz="3200" dirty="0"/>
+          </a:p>
+        </p:txBody>
+      </p:sp>
+      <p:sp>
+        <p:nvSpPr>
+          <p:cNvPr id="12" name="Rectangle: Rounded Corners 11">
+            <a:extLst>
+              <a:ext uri="{FF2B5EF4-FFF2-40B4-BE49-F238E27FC236}">
+                <a16:creationId xmlns:a16="http://schemas.microsoft.com/office/drawing/2014/main" id="{48ABFB2E-C2ED-E8AC-642D-D8F0F0AFAB91}"/>
+              </a:ext>
+            </a:extLst>
+          </p:cNvPr>
+          <p:cNvSpPr/>
+          <p:nvPr/>
+        </p:nvSpPr>
+        <p:spPr>
+          <a:xfrm>
+            <a:off x="145606" y="142562"/>
+            <a:ext cx="403034" cy="403034"/>
+          </a:xfrm>
+          <a:prstGeom prst="roundRect">
+            <a:avLst/>
+          </a:prstGeom>
+          <a:solidFill>
+            <a:schemeClr val="bg1"/>
+          </a:solidFill>
+          <a:ln>
+            <a:noFill/>
+          </a:ln>
+        </p:spPr>
+        <p:style>
+          <a:lnRef idx="2">
+            <a:schemeClr val="accent1">
+              <a:shade val="15000"/>
+            </a:schemeClr>
+          </a:lnRef>
+          <a:fillRef idx="1">
+            <a:schemeClr val="accent1"/>
+          </a:fillRef>
+          <a:effectRef idx="0">
+            <a:schemeClr val="accent1"/>
+          </a:effectRef>
+          <a:fontRef idx="minor">
+            <a:schemeClr val="lt1"/>
+          </a:fontRef>
+        </p:style>
+        <p:txBody>
+          <a:bodyPr rtlCol="0" anchor="ctr"/>
+          <a:lstStyle/>
+          <a:p>
+            <a:pPr algn="ctr"/>
+            <a:r>
+              <a:rPr lang="ru-RU" dirty="0"/>
+              <a:t>ё</a:t>
+            </a:r>
+            <a:endParaRPr lang="en-US" dirty="0"/>
+          </a:p>
+        </p:txBody>
+      </p:sp>
+      <p:sp>
+        <p:nvSpPr>
+          <p:cNvPr id="2" name="Slide Number Placeholder 1">
+            <a:extLst>
+              <a:ext uri="{FF2B5EF4-FFF2-40B4-BE49-F238E27FC236}">
+                <a16:creationId xmlns:a16="http://schemas.microsoft.com/office/drawing/2014/main" id="{3293EAB2-CDA0-2FF5-57DD-2FFE800C6107}"/>
+              </a:ext>
+            </a:extLst>
+          </p:cNvPr>
+          <p:cNvSpPr>
+            <a:spLocks noGrp="1"/>
+          </p:cNvSpPr>
+          <p:nvPr>
+            <p:ph type="sldNum" sz="quarter" idx="12"/>
+          </p:nvPr>
+        </p:nvSpPr>
+        <p:spPr>
+          <a:xfrm>
+            <a:off x="145606" y="142562"/>
+            <a:ext cx="403034" cy="403034"/>
+          </a:xfrm>
+        </p:spPr>
+        <p:txBody>
+          <a:bodyPr/>
+          <a:lstStyle/>
+          <a:p>
+            <a:pPr algn="ctr"/>
+            <a:fld id="{E484B7D4-87AC-4334-8015-F9E0E28AB063}" type="slidenum">
+              <a:rPr lang="en-US" sz="2400" smtClean="0">
+                <a:solidFill>
+                  <a:srgbClr val="222222"/>
+                </a:solidFill>
+              </a:rPr>
+              <a:pPr algn="ctr"/>
+              <a:t>4</a:t>
+            </a:fld>
+            <a:endParaRPr lang="en-US" sz="2400" dirty="0">
+              <a:solidFill>
+                <a:srgbClr val="222222"/>
+              </a:solidFill>
+            </a:endParaRPr>
+          </a:p>
+        </p:txBody>
+      </p:sp>
+    </p:spTree>
+    <p:extLst>
+      <p:ext uri="{BB962C8B-B14F-4D97-AF65-F5344CB8AC3E}">
+        <p14:creationId xmlns:p14="http://schemas.microsoft.com/office/powerpoint/2010/main" val="2486222194"/>
+      </p:ext>
+    </p:extLst>
+  </p:cSld>
+  <p:clrMapOvr>
+    <a:masterClrMapping/>
+  </p:clrMapOvr>
+</p:sld>
+</file>
+
+<file path=ppt/slides/slide5.xml><?xml version="1.0" encoding="utf-8"?>
+<p:sld xmlns:a="http://schemas.openxmlformats.org/drawingml/2006/main" xmlns:r="http://schemas.openxmlformats.org/officeDocument/2006/relationships" xmlns:p="http://schemas.openxmlformats.org/presentationml/2006/main">
+  <p:cSld>
+    <p:spTree>
+      <p:nvGrpSpPr>
+        <p:cNvPr id="1" name="">
+          <a:extLst>
+            <a:ext uri="{FF2B5EF4-FFF2-40B4-BE49-F238E27FC236}">
+              <a16:creationId xmlns:a16="http://schemas.microsoft.com/office/drawing/2014/main" id="{F0307F7F-12B3-82F6-B5D5-6F09083B6960}"/>
+            </a:ext>
+          </a:extLst>
+        </p:cNvPr>
+        <p:cNvGrpSpPr/>
+        <p:nvPr/>
+      </p:nvGrpSpPr>
+      <p:grpSpPr>
+        <a:xfrm>
+          <a:off x="0" y="0"/>
+          <a:ext cx="0" cy="0"/>
+          <a:chOff x="0" y="0"/>
+          <a:chExt cx="0" cy="0"/>
+        </a:xfrm>
+      </p:grpSpPr>
+      <p:sp>
+        <p:nvSpPr>
+          <p:cNvPr id="9" name="Rectangle 8">
+            <a:extLst>
+              <a:ext uri="{FF2B5EF4-FFF2-40B4-BE49-F238E27FC236}">
+                <a16:creationId xmlns:a16="http://schemas.microsoft.com/office/drawing/2014/main" id="{28FDE085-0E97-60A2-7531-C0BB37A79494}"/>
+              </a:ext>
+            </a:extLst>
+          </p:cNvPr>
+          <p:cNvSpPr/>
+          <p:nvPr/>
+        </p:nvSpPr>
+        <p:spPr>
+          <a:xfrm>
+            <a:off x="0" y="0"/>
+            <a:ext cx="12192000" cy="688157"/>
+          </a:xfrm>
+          <a:prstGeom prst="rect">
+            <a:avLst/>
+          </a:prstGeom>
+          <a:solidFill>
+            <a:srgbClr val="222222"/>
+          </a:solidFill>
+          <a:ln>
+            <a:noFill/>
+          </a:ln>
+        </p:spPr>
+        <p:style>
+          <a:lnRef idx="2">
+            <a:schemeClr val="accent1">
+              <a:shade val="15000"/>
+            </a:schemeClr>
+          </a:lnRef>
+          <a:fillRef idx="1">
+            <a:schemeClr val="accent1"/>
+          </a:fillRef>
+          <a:effectRef idx="0">
+            <a:schemeClr val="accent1"/>
+          </a:effectRef>
+          <a:fontRef idx="minor">
+            <a:schemeClr val="lt1"/>
+          </a:fontRef>
+        </p:style>
+        <p:txBody>
+          <a:bodyPr rtlCol="0" anchor="ctr"/>
+          <a:lstStyle/>
+          <a:p>
+            <a:pPr algn="ctr"/>
+            <a:r>
+              <a:rPr lang="ru-RU" sz="3200" dirty="0"/>
+              <a:t>Чанкование</a:t>
+            </a:r>
+            <a:endParaRPr lang="en-US" sz="3200" dirty="0"/>
+          </a:p>
+        </p:txBody>
+      </p:sp>
+      <p:sp>
+        <p:nvSpPr>
+          <p:cNvPr id="12" name="Rectangle: Rounded Corners 11">
+            <a:extLst>
+              <a:ext uri="{FF2B5EF4-FFF2-40B4-BE49-F238E27FC236}">
+                <a16:creationId xmlns:a16="http://schemas.microsoft.com/office/drawing/2014/main" id="{4A65B33F-296C-C6AC-94D2-BB4BD4F0CD20}"/>
+              </a:ext>
+            </a:extLst>
+          </p:cNvPr>
+          <p:cNvSpPr/>
+          <p:nvPr/>
+        </p:nvSpPr>
+        <p:spPr>
+          <a:xfrm>
+            <a:off x="145606" y="142562"/>
+            <a:ext cx="403034" cy="403034"/>
+          </a:xfrm>
+          <a:prstGeom prst="roundRect">
+            <a:avLst/>
+          </a:prstGeom>
+          <a:solidFill>
+            <a:schemeClr val="bg1"/>
+          </a:solidFill>
+          <a:ln>
+            <a:noFill/>
+          </a:ln>
+        </p:spPr>
+        <p:style>
+          <a:lnRef idx="2">
+            <a:schemeClr val="accent1">
+              <a:shade val="15000"/>
+            </a:schemeClr>
+          </a:lnRef>
+          <a:fillRef idx="1">
+            <a:schemeClr val="accent1"/>
+          </a:fillRef>
+          <a:effectRef idx="0">
+            <a:schemeClr val="accent1"/>
+          </a:effectRef>
+          <a:fontRef idx="minor">
+            <a:schemeClr val="lt1"/>
+          </a:fontRef>
+        </p:style>
+        <p:txBody>
+          <a:bodyPr rtlCol="0" anchor="ctr"/>
+          <a:lstStyle/>
+          <a:p>
+            <a:pPr algn="ctr"/>
+            <a:r>
+              <a:rPr lang="ru-RU" dirty="0"/>
+              <a:t>ё</a:t>
+            </a:r>
+            <a:endParaRPr lang="en-US" dirty="0"/>
+          </a:p>
+        </p:txBody>
+      </p:sp>
+      <p:sp>
+        <p:nvSpPr>
+          <p:cNvPr id="2" name="Slide Number Placeholder 1">
+            <a:extLst>
+              <a:ext uri="{FF2B5EF4-FFF2-40B4-BE49-F238E27FC236}">
+                <a16:creationId xmlns:a16="http://schemas.microsoft.com/office/drawing/2014/main" id="{8990B24B-C0C1-746A-5611-07567C15162F}"/>
+              </a:ext>
+            </a:extLst>
+          </p:cNvPr>
+          <p:cNvSpPr>
+            <a:spLocks noGrp="1"/>
+          </p:cNvSpPr>
+          <p:nvPr>
+            <p:ph type="sldNum" sz="quarter" idx="12"/>
+          </p:nvPr>
+        </p:nvSpPr>
+        <p:spPr>
+          <a:xfrm>
+            <a:off x="145606" y="142562"/>
+            <a:ext cx="403034" cy="403034"/>
+          </a:xfrm>
+        </p:spPr>
+        <p:txBody>
+          <a:bodyPr/>
+          <a:lstStyle/>
+          <a:p>
+            <a:pPr algn="ctr"/>
+            <a:fld id="{E484B7D4-87AC-4334-8015-F9E0E28AB063}" type="slidenum">
+              <a:rPr lang="en-US" sz="2400" smtClean="0">
+                <a:solidFill>
+                  <a:srgbClr val="222222"/>
+                </a:solidFill>
+              </a:rPr>
+              <a:pPr algn="ctr"/>
+              <a:t>5</a:t>
+            </a:fld>
+            <a:endParaRPr lang="en-US" sz="2400" dirty="0">
+              <a:solidFill>
+                <a:srgbClr val="222222"/>
+              </a:solidFill>
+            </a:endParaRPr>
+          </a:p>
+        </p:txBody>
+      </p:sp>
+    </p:spTree>
+    <p:extLst>
+      <p:ext uri="{BB962C8B-B14F-4D97-AF65-F5344CB8AC3E}">
+        <p14:creationId xmlns:p14="http://schemas.microsoft.com/office/powerpoint/2010/main" val="1456142563"/>
+      </p:ext>
+    </p:extLst>
+  </p:cSld>
+  <p:clrMapOvr>
+    <a:masterClrMapping/>
+  </p:clrMapOvr>
+</p:sld>
+</file>
+
+<file path=ppt/slides/slide6.xml><?xml version="1.0" encoding="utf-8"?>
+<p:sld xmlns:a="http://schemas.openxmlformats.org/drawingml/2006/main" xmlns:r="http://schemas.openxmlformats.org/officeDocument/2006/relationships" xmlns:p="http://schemas.openxmlformats.org/presentationml/2006/main">
+  <p:cSld>
+    <p:spTree>
+      <p:nvGrpSpPr>
+        <p:cNvPr id="1" name="">
+          <a:extLst>
+            <a:ext uri="{FF2B5EF4-FFF2-40B4-BE49-F238E27FC236}">
+              <a16:creationId xmlns:a16="http://schemas.microsoft.com/office/drawing/2014/main" id="{8CD4DF09-A904-DD09-AF21-FF3962709D2E}"/>
+            </a:ext>
+          </a:extLst>
+        </p:cNvPr>
+        <p:cNvGrpSpPr/>
+        <p:nvPr/>
+      </p:nvGrpSpPr>
+      <p:grpSpPr>
+        <a:xfrm>
+          <a:off x="0" y="0"/>
+          <a:ext cx="0" cy="0"/>
+          <a:chOff x="0" y="0"/>
+          <a:chExt cx="0" cy="0"/>
+        </a:xfrm>
+      </p:grpSpPr>
+      <p:sp>
+        <p:nvSpPr>
+          <p:cNvPr id="9" name="Rectangle 8">
+            <a:extLst>
+              <a:ext uri="{FF2B5EF4-FFF2-40B4-BE49-F238E27FC236}">
+                <a16:creationId xmlns:a16="http://schemas.microsoft.com/office/drawing/2014/main" id="{CBA190DD-1BD7-CA00-FD7C-8845F6928ED7}"/>
+              </a:ext>
+            </a:extLst>
+          </p:cNvPr>
+          <p:cNvSpPr/>
+          <p:nvPr/>
+        </p:nvSpPr>
+        <p:spPr>
+          <a:xfrm>
+            <a:off x="0" y="0"/>
+            <a:ext cx="12192000" cy="688157"/>
+          </a:xfrm>
+          <a:prstGeom prst="rect">
+            <a:avLst/>
+          </a:prstGeom>
+          <a:solidFill>
+            <a:srgbClr val="222222"/>
+          </a:solidFill>
+          <a:ln>
+            <a:noFill/>
+          </a:ln>
+        </p:spPr>
+        <p:style>
+          <a:lnRef idx="2">
+            <a:schemeClr val="accent1">
+              <a:shade val="15000"/>
+            </a:schemeClr>
+          </a:lnRef>
+          <a:fillRef idx="1">
+            <a:schemeClr val="accent1"/>
+          </a:fillRef>
+          <a:effectRef idx="0">
+            <a:schemeClr val="accent1"/>
+          </a:effectRef>
+          <a:fontRef idx="minor">
+            <a:schemeClr val="lt1"/>
+          </a:fontRef>
+        </p:style>
+        <p:txBody>
+          <a:bodyPr rtlCol="0" anchor="ctr"/>
+          <a:lstStyle/>
+          <a:p>
+            <a:pPr algn="ctr"/>
+            <a:r>
+              <a:rPr lang="ru-RU" sz="3200" dirty="0"/>
+              <a:t>Векторизация</a:t>
+            </a:r>
+            <a:endParaRPr lang="en-US" sz="3200" dirty="0"/>
+          </a:p>
+        </p:txBody>
+      </p:sp>
+      <p:sp>
+        <p:nvSpPr>
+          <p:cNvPr id="12" name="Rectangle: Rounded Corners 11">
+            <a:extLst>
+              <a:ext uri="{FF2B5EF4-FFF2-40B4-BE49-F238E27FC236}">
+                <a16:creationId xmlns:a16="http://schemas.microsoft.com/office/drawing/2014/main" id="{E61F83F8-F620-2D15-ADA6-24AC55178558}"/>
+              </a:ext>
+            </a:extLst>
+          </p:cNvPr>
+          <p:cNvSpPr/>
+          <p:nvPr/>
+        </p:nvSpPr>
+        <p:spPr>
+          <a:xfrm>
+            <a:off x="145606" y="142562"/>
+            <a:ext cx="403034" cy="403034"/>
+          </a:xfrm>
+          <a:prstGeom prst="roundRect">
+            <a:avLst/>
+          </a:prstGeom>
+          <a:solidFill>
+            <a:schemeClr val="bg1"/>
+          </a:solidFill>
+          <a:ln>
+            <a:noFill/>
+          </a:ln>
+        </p:spPr>
+        <p:style>
+          <a:lnRef idx="2">
+            <a:schemeClr val="accent1">
+              <a:shade val="15000"/>
+            </a:schemeClr>
+          </a:lnRef>
+          <a:fillRef idx="1">
+            <a:schemeClr val="accent1"/>
+          </a:fillRef>
+          <a:effectRef idx="0">
+            <a:schemeClr val="accent1"/>
+          </a:effectRef>
+          <a:fontRef idx="minor">
+            <a:schemeClr val="lt1"/>
+          </a:fontRef>
+        </p:style>
+        <p:txBody>
+          <a:bodyPr rtlCol="0" anchor="ctr"/>
+          <a:lstStyle/>
+          <a:p>
+            <a:pPr algn="ctr"/>
+            <a:r>
+              <a:rPr lang="ru-RU" dirty="0"/>
+              <a:t>ё</a:t>
+            </a:r>
+            <a:endParaRPr lang="en-US" dirty="0"/>
+          </a:p>
+        </p:txBody>
+      </p:sp>
+      <p:sp>
+        <p:nvSpPr>
+          <p:cNvPr id="2" name="Slide Number Placeholder 1">
+            <a:extLst>
+              <a:ext uri="{FF2B5EF4-FFF2-40B4-BE49-F238E27FC236}">
+                <a16:creationId xmlns:a16="http://schemas.microsoft.com/office/drawing/2014/main" id="{E3683E80-AF34-C154-01BE-B5341BC93EB2}"/>
+              </a:ext>
+            </a:extLst>
+          </p:cNvPr>
+          <p:cNvSpPr>
+            <a:spLocks noGrp="1"/>
+          </p:cNvSpPr>
+          <p:nvPr>
+            <p:ph type="sldNum" sz="quarter" idx="12"/>
+          </p:nvPr>
+        </p:nvSpPr>
+        <p:spPr>
+          <a:xfrm>
+            <a:off x="145606" y="142562"/>
+            <a:ext cx="403034" cy="403034"/>
+          </a:xfrm>
+        </p:spPr>
+        <p:txBody>
+          <a:bodyPr/>
+          <a:lstStyle/>
+          <a:p>
+            <a:pPr algn="ctr"/>
+            <a:fld id="{E484B7D4-87AC-4334-8015-F9E0E28AB063}" type="slidenum">
+              <a:rPr lang="en-US" sz="2400" smtClean="0">
+                <a:solidFill>
+                  <a:srgbClr val="222222"/>
+                </a:solidFill>
+              </a:rPr>
+              <a:pPr algn="ctr"/>
+              <a:t>6</a:t>
+            </a:fld>
+            <a:endParaRPr lang="en-US" sz="2400" dirty="0">
+              <a:solidFill>
+                <a:srgbClr val="222222"/>
+              </a:solidFill>
+            </a:endParaRPr>
+          </a:p>
+        </p:txBody>
+      </p:sp>
+    </p:spTree>
+    <p:extLst>
+      <p:ext uri="{BB962C8B-B14F-4D97-AF65-F5344CB8AC3E}">
+        <p14:creationId xmlns:p14="http://schemas.microsoft.com/office/powerpoint/2010/main" val="319574929"/>
+      </p:ext>
+    </p:extLst>
+  </p:cSld>
+  <p:clrMapOvr>
+    <a:masterClrMapping/>
+  </p:clrMapOvr>
+</p:sld>
+</file>
+
+<file path=ppt/slides/slide7.xml><?xml version="1.0" encoding="utf-8"?>
+<p:sld xmlns:a="http://schemas.openxmlformats.org/drawingml/2006/main" xmlns:r="http://schemas.openxmlformats.org/officeDocument/2006/relationships" xmlns:p="http://schemas.openxmlformats.org/presentationml/2006/main">
+  <p:cSld>
+    <p:spTree>
+      <p:nvGrpSpPr>
+        <p:cNvPr id="1" name="">
+          <a:extLst>
+            <a:ext uri="{FF2B5EF4-FFF2-40B4-BE49-F238E27FC236}">
+              <a16:creationId xmlns:a16="http://schemas.microsoft.com/office/drawing/2014/main" id="{588CAC52-1C30-135F-8354-BC88919F04BD}"/>
+            </a:ext>
+          </a:extLst>
+        </p:cNvPr>
+        <p:cNvGrpSpPr/>
+        <p:nvPr/>
+      </p:nvGrpSpPr>
+      <p:grpSpPr>
+        <a:xfrm>
+          <a:off x="0" y="0"/>
+          <a:ext cx="0" cy="0"/>
+          <a:chOff x="0" y="0"/>
+          <a:chExt cx="0" cy="0"/>
+        </a:xfrm>
+      </p:grpSpPr>
+      <p:sp>
+        <p:nvSpPr>
+          <p:cNvPr id="9" name="Rectangle 8">
+            <a:extLst>
+              <a:ext uri="{FF2B5EF4-FFF2-40B4-BE49-F238E27FC236}">
+                <a16:creationId xmlns:a16="http://schemas.microsoft.com/office/drawing/2014/main" id="{06595065-ABD3-F0CB-1699-62DDC42A1E5C}"/>
+              </a:ext>
+            </a:extLst>
+          </p:cNvPr>
+          <p:cNvSpPr/>
+          <p:nvPr/>
+        </p:nvSpPr>
+        <p:spPr>
+          <a:xfrm>
+            <a:off x="0" y="0"/>
+            <a:ext cx="12192000" cy="688157"/>
+          </a:xfrm>
+          <a:prstGeom prst="rect">
+            <a:avLst/>
+          </a:prstGeom>
+          <a:solidFill>
+            <a:srgbClr val="222222"/>
+          </a:solidFill>
+          <a:ln>
+            <a:noFill/>
+          </a:ln>
+        </p:spPr>
+        <p:style>
+          <a:lnRef idx="2">
+            <a:schemeClr val="accent1">
+              <a:shade val="15000"/>
+            </a:schemeClr>
+          </a:lnRef>
+          <a:fillRef idx="1">
+            <a:schemeClr val="accent1"/>
+          </a:fillRef>
+          <a:effectRef idx="0">
+            <a:schemeClr val="accent1"/>
+          </a:effectRef>
+          <a:fontRef idx="minor">
+            <a:schemeClr val="lt1"/>
+          </a:fontRef>
+        </p:style>
+        <p:txBody>
+          <a:bodyPr rtlCol="0" anchor="ctr"/>
+          <a:lstStyle/>
+          <a:p>
+            <a:pPr algn="ctr"/>
+            <a:r>
+              <a:rPr lang="ru-RU" sz="3200" dirty="0"/>
+              <a:t>Как храним данные?</a:t>
+            </a:r>
+            <a:endParaRPr lang="en-US" sz="3200" dirty="0"/>
+          </a:p>
+        </p:txBody>
+      </p:sp>
+      <p:sp>
+        <p:nvSpPr>
+          <p:cNvPr id="12" name="Rectangle: Rounded Corners 11">
+            <a:extLst>
+              <a:ext uri="{FF2B5EF4-FFF2-40B4-BE49-F238E27FC236}">
+                <a16:creationId xmlns:a16="http://schemas.microsoft.com/office/drawing/2014/main" id="{8011B823-CF69-0C1E-D1CE-2811B4815B0A}"/>
+              </a:ext>
+            </a:extLst>
+          </p:cNvPr>
+          <p:cNvSpPr/>
+          <p:nvPr/>
+        </p:nvSpPr>
+        <p:spPr>
+          <a:xfrm>
+            <a:off x="145606" y="142562"/>
+            <a:ext cx="403034" cy="403034"/>
+          </a:xfrm>
+          <a:prstGeom prst="roundRect">
+            <a:avLst/>
+          </a:prstGeom>
+          <a:solidFill>
+            <a:schemeClr val="bg1"/>
+          </a:solidFill>
+          <a:ln>
+            <a:noFill/>
+          </a:ln>
+        </p:spPr>
+        <p:style>
+          <a:lnRef idx="2">
+            <a:schemeClr val="accent1">
+              <a:shade val="15000"/>
+            </a:schemeClr>
+          </a:lnRef>
+          <a:fillRef idx="1">
+            <a:schemeClr val="accent1"/>
+          </a:fillRef>
+          <a:effectRef idx="0">
+            <a:schemeClr val="accent1"/>
+          </a:effectRef>
+          <a:fontRef idx="minor">
+            <a:schemeClr val="lt1"/>
+          </a:fontRef>
+        </p:style>
+        <p:txBody>
+          <a:bodyPr rtlCol="0" anchor="ctr"/>
+          <a:lstStyle/>
+          <a:p>
+            <a:pPr algn="ctr"/>
+            <a:r>
+              <a:rPr lang="ru-RU" dirty="0"/>
+              <a:t>ё</a:t>
+            </a:r>
+            <a:endParaRPr lang="en-US" dirty="0"/>
+          </a:p>
+        </p:txBody>
+      </p:sp>
+      <p:sp>
+        <p:nvSpPr>
+          <p:cNvPr id="2" name="Slide Number Placeholder 1">
+            <a:extLst>
+              <a:ext uri="{FF2B5EF4-FFF2-40B4-BE49-F238E27FC236}">
+                <a16:creationId xmlns:a16="http://schemas.microsoft.com/office/drawing/2014/main" id="{9A392AE8-5B17-1841-0A6C-1EF1AACE9577}"/>
+              </a:ext>
+            </a:extLst>
+          </p:cNvPr>
+          <p:cNvSpPr>
+            <a:spLocks noGrp="1"/>
+          </p:cNvSpPr>
+          <p:nvPr>
+            <p:ph type="sldNum" sz="quarter" idx="12"/>
+          </p:nvPr>
+        </p:nvSpPr>
+        <p:spPr>
+          <a:xfrm>
+            <a:off x="145606" y="142562"/>
+            <a:ext cx="403034" cy="403034"/>
+          </a:xfrm>
+        </p:spPr>
+        <p:txBody>
+          <a:bodyPr/>
+          <a:lstStyle/>
+          <a:p>
+            <a:pPr algn="ctr"/>
+            <a:fld id="{E484B7D4-87AC-4334-8015-F9E0E28AB063}" type="slidenum">
+              <a:rPr lang="en-US" sz="2400" smtClean="0">
+                <a:solidFill>
+                  <a:srgbClr val="222222"/>
+                </a:solidFill>
+              </a:rPr>
+              <a:pPr algn="ctr"/>
+              <a:t>7</a:t>
+            </a:fld>
+            <a:endParaRPr lang="en-US" sz="2400" dirty="0">
+              <a:solidFill>
+                <a:srgbClr val="222222"/>
+              </a:solidFill>
+            </a:endParaRPr>
+          </a:p>
+        </p:txBody>
+      </p:sp>
+    </p:spTree>
+    <p:extLst>
+      <p:ext uri="{BB962C8B-B14F-4D97-AF65-F5344CB8AC3E}">
+        <p14:creationId xmlns:p14="http://schemas.microsoft.com/office/powerpoint/2010/main" val="3798142391"/>
+      </p:ext>
+    </p:extLst>
+  </p:cSld>
+  <p:clrMapOvr>
+    <a:masterClrMapping/>
+  </p:clrMapOvr>
+</p:sld>
+</file>
+
+<file path=ppt/slides/slide8.xml><?xml version="1.0" encoding="utf-8"?>
 <p:sld xmlns:a="http://schemas.openxmlformats.org/drawingml/2006/main" xmlns:r="http://schemas.openxmlformats.org/officeDocument/2006/relationships" xmlns:p="http://schemas.openxmlformats.org/presentationml/2006/main">
   <p:cSld>
     <p:spTree>
@@ -4927,7 +6603,11 @@
           <a:lstStyle/>
           <a:p>
             <a:pPr algn="ctr"/>
-            <a:endParaRPr lang="en-US"/>
+            <a:r>
+              <a:rPr lang="ru-RU" sz="3200" dirty="0"/>
+              <a:t>Общая картина архитектуры проекта</a:t>
+            </a:r>
+            <a:endParaRPr lang="en-US" sz="3200" dirty="0"/>
           </a:p>
         </p:txBody>
       </p:sp>
@@ -5021,758 +6701,6 @@
                 </a:solidFill>
               </a:rPr>
               <a:pPr algn="ctr"/>
-              <a:t>4</a:t>
-            </a:fld>
-            <a:endParaRPr lang="en-US" sz="2400" dirty="0">
-              <a:solidFill>
-                <a:srgbClr val="222222"/>
-              </a:solidFill>
-            </a:endParaRPr>
-          </a:p>
-        </p:txBody>
-      </p:sp>
-    </p:spTree>
-    <p:extLst>
-      <p:ext uri="{BB962C8B-B14F-4D97-AF65-F5344CB8AC3E}">
-        <p14:creationId xmlns:p14="http://schemas.microsoft.com/office/powerpoint/2010/main" val="4062801928"/>
-      </p:ext>
-    </p:extLst>
-  </p:cSld>
-  <p:clrMapOvr>
-    <a:masterClrMapping/>
-  </p:clrMapOvr>
-</p:sld>
-</file>
-
-<file path=ppt/slides/slide5.xml><?xml version="1.0" encoding="utf-8"?>
-<p:sld xmlns:a="http://schemas.openxmlformats.org/drawingml/2006/main" xmlns:r="http://schemas.openxmlformats.org/officeDocument/2006/relationships" xmlns:p="http://schemas.openxmlformats.org/presentationml/2006/main">
-  <p:cSld>
-    <p:spTree>
-      <p:nvGrpSpPr>
-        <p:cNvPr id="1" name="">
-          <a:extLst>
-            <a:ext uri="{FF2B5EF4-FFF2-40B4-BE49-F238E27FC236}">
-              <a16:creationId xmlns:a16="http://schemas.microsoft.com/office/drawing/2014/main" id="{1D6278FD-C71C-5992-580B-06313E58D26A}"/>
-            </a:ext>
-          </a:extLst>
-        </p:cNvPr>
-        <p:cNvGrpSpPr/>
-        <p:nvPr/>
-      </p:nvGrpSpPr>
-      <p:grpSpPr>
-        <a:xfrm>
-          <a:off x="0" y="0"/>
-          <a:ext cx="0" cy="0"/>
-          <a:chOff x="0" y="0"/>
-          <a:chExt cx="0" cy="0"/>
-        </a:xfrm>
-      </p:grpSpPr>
-      <p:sp>
-        <p:nvSpPr>
-          <p:cNvPr id="9" name="Rectangle 8">
-            <a:extLst>
-              <a:ext uri="{FF2B5EF4-FFF2-40B4-BE49-F238E27FC236}">
-                <a16:creationId xmlns:a16="http://schemas.microsoft.com/office/drawing/2014/main" id="{41E7DB20-0EF9-2E79-BF52-304B8C08D058}"/>
-              </a:ext>
-            </a:extLst>
-          </p:cNvPr>
-          <p:cNvSpPr/>
-          <p:nvPr/>
-        </p:nvSpPr>
-        <p:spPr>
-          <a:xfrm>
-            <a:off x="0" y="0"/>
-            <a:ext cx="12192000" cy="688157"/>
-          </a:xfrm>
-          <a:prstGeom prst="rect">
-            <a:avLst/>
-          </a:prstGeom>
-          <a:solidFill>
-            <a:srgbClr val="222222"/>
-          </a:solidFill>
-          <a:ln>
-            <a:noFill/>
-          </a:ln>
-        </p:spPr>
-        <p:style>
-          <a:lnRef idx="2">
-            <a:schemeClr val="accent1">
-              <a:shade val="15000"/>
-            </a:schemeClr>
-          </a:lnRef>
-          <a:fillRef idx="1">
-            <a:schemeClr val="accent1"/>
-          </a:fillRef>
-          <a:effectRef idx="0">
-            <a:schemeClr val="accent1"/>
-          </a:effectRef>
-          <a:fontRef idx="minor">
-            <a:schemeClr val="lt1"/>
-          </a:fontRef>
-        </p:style>
-        <p:txBody>
-          <a:bodyPr rtlCol="0" anchor="ctr"/>
-          <a:lstStyle/>
-          <a:p>
-            <a:pPr algn="ctr"/>
-            <a:endParaRPr lang="en-US"/>
-          </a:p>
-        </p:txBody>
-      </p:sp>
-      <p:sp>
-        <p:nvSpPr>
-          <p:cNvPr id="12" name="Rectangle: Rounded Corners 11">
-            <a:extLst>
-              <a:ext uri="{FF2B5EF4-FFF2-40B4-BE49-F238E27FC236}">
-                <a16:creationId xmlns:a16="http://schemas.microsoft.com/office/drawing/2014/main" id="{48ABFB2E-C2ED-E8AC-642D-D8F0F0AFAB91}"/>
-              </a:ext>
-            </a:extLst>
-          </p:cNvPr>
-          <p:cNvSpPr/>
-          <p:nvPr/>
-        </p:nvSpPr>
-        <p:spPr>
-          <a:xfrm>
-            <a:off x="145606" y="142562"/>
-            <a:ext cx="403034" cy="403034"/>
-          </a:xfrm>
-          <a:prstGeom prst="roundRect">
-            <a:avLst/>
-          </a:prstGeom>
-          <a:solidFill>
-            <a:schemeClr val="bg1"/>
-          </a:solidFill>
-          <a:ln>
-            <a:noFill/>
-          </a:ln>
-        </p:spPr>
-        <p:style>
-          <a:lnRef idx="2">
-            <a:schemeClr val="accent1">
-              <a:shade val="15000"/>
-            </a:schemeClr>
-          </a:lnRef>
-          <a:fillRef idx="1">
-            <a:schemeClr val="accent1"/>
-          </a:fillRef>
-          <a:effectRef idx="0">
-            <a:schemeClr val="accent1"/>
-          </a:effectRef>
-          <a:fontRef idx="minor">
-            <a:schemeClr val="lt1"/>
-          </a:fontRef>
-        </p:style>
-        <p:txBody>
-          <a:bodyPr rtlCol="0" anchor="ctr"/>
-          <a:lstStyle/>
-          <a:p>
-            <a:pPr algn="ctr"/>
-            <a:r>
-              <a:rPr lang="ru-RU" dirty="0"/>
-              <a:t>ё</a:t>
-            </a:r>
-            <a:endParaRPr lang="en-US" dirty="0"/>
-          </a:p>
-        </p:txBody>
-      </p:sp>
-      <p:sp>
-        <p:nvSpPr>
-          <p:cNvPr id="2" name="Slide Number Placeholder 1">
-            <a:extLst>
-              <a:ext uri="{FF2B5EF4-FFF2-40B4-BE49-F238E27FC236}">
-                <a16:creationId xmlns:a16="http://schemas.microsoft.com/office/drawing/2014/main" id="{3293EAB2-CDA0-2FF5-57DD-2FFE800C6107}"/>
-              </a:ext>
-            </a:extLst>
-          </p:cNvPr>
-          <p:cNvSpPr>
-            <a:spLocks noGrp="1"/>
-          </p:cNvSpPr>
-          <p:nvPr>
-            <p:ph type="sldNum" sz="quarter" idx="12"/>
-          </p:nvPr>
-        </p:nvSpPr>
-        <p:spPr>
-          <a:xfrm>
-            <a:off x="145606" y="142562"/>
-            <a:ext cx="403034" cy="403034"/>
-          </a:xfrm>
-        </p:spPr>
-        <p:txBody>
-          <a:bodyPr/>
-          <a:lstStyle/>
-          <a:p>
-            <a:pPr algn="ctr"/>
-            <a:fld id="{E484B7D4-87AC-4334-8015-F9E0E28AB063}" type="slidenum">
-              <a:rPr lang="en-US" sz="2400" smtClean="0">
-                <a:solidFill>
-                  <a:srgbClr val="222222"/>
-                </a:solidFill>
-              </a:rPr>
-              <a:pPr algn="ctr"/>
-              <a:t>5</a:t>
-            </a:fld>
-            <a:endParaRPr lang="en-US" sz="2400" dirty="0">
-              <a:solidFill>
-                <a:srgbClr val="222222"/>
-              </a:solidFill>
-            </a:endParaRPr>
-          </a:p>
-        </p:txBody>
-      </p:sp>
-    </p:spTree>
-    <p:extLst>
-      <p:ext uri="{BB962C8B-B14F-4D97-AF65-F5344CB8AC3E}">
-        <p14:creationId xmlns:p14="http://schemas.microsoft.com/office/powerpoint/2010/main" val="2486222194"/>
-      </p:ext>
-    </p:extLst>
-  </p:cSld>
-  <p:clrMapOvr>
-    <a:masterClrMapping/>
-  </p:clrMapOvr>
-</p:sld>
-</file>
-
-<file path=ppt/slides/slide6.xml><?xml version="1.0" encoding="utf-8"?>
-<p:sld xmlns:a="http://schemas.openxmlformats.org/drawingml/2006/main" xmlns:r="http://schemas.openxmlformats.org/officeDocument/2006/relationships" xmlns:p="http://schemas.openxmlformats.org/presentationml/2006/main">
-  <p:cSld>
-    <p:spTree>
-      <p:nvGrpSpPr>
-        <p:cNvPr id="1" name="">
-          <a:extLst>
-            <a:ext uri="{FF2B5EF4-FFF2-40B4-BE49-F238E27FC236}">
-              <a16:creationId xmlns:a16="http://schemas.microsoft.com/office/drawing/2014/main" id="{588CAC52-1C30-135F-8354-BC88919F04BD}"/>
-            </a:ext>
-          </a:extLst>
-        </p:cNvPr>
-        <p:cNvGrpSpPr/>
-        <p:nvPr/>
-      </p:nvGrpSpPr>
-      <p:grpSpPr>
-        <a:xfrm>
-          <a:off x="0" y="0"/>
-          <a:ext cx="0" cy="0"/>
-          <a:chOff x="0" y="0"/>
-          <a:chExt cx="0" cy="0"/>
-        </a:xfrm>
-      </p:grpSpPr>
-      <p:sp>
-        <p:nvSpPr>
-          <p:cNvPr id="9" name="Rectangle 8">
-            <a:extLst>
-              <a:ext uri="{FF2B5EF4-FFF2-40B4-BE49-F238E27FC236}">
-                <a16:creationId xmlns:a16="http://schemas.microsoft.com/office/drawing/2014/main" id="{06595065-ABD3-F0CB-1699-62DDC42A1E5C}"/>
-              </a:ext>
-            </a:extLst>
-          </p:cNvPr>
-          <p:cNvSpPr/>
-          <p:nvPr/>
-        </p:nvSpPr>
-        <p:spPr>
-          <a:xfrm>
-            <a:off x="0" y="0"/>
-            <a:ext cx="12192000" cy="688157"/>
-          </a:xfrm>
-          <a:prstGeom prst="rect">
-            <a:avLst/>
-          </a:prstGeom>
-          <a:solidFill>
-            <a:srgbClr val="222222"/>
-          </a:solidFill>
-          <a:ln>
-            <a:noFill/>
-          </a:ln>
-        </p:spPr>
-        <p:style>
-          <a:lnRef idx="2">
-            <a:schemeClr val="accent1">
-              <a:shade val="15000"/>
-            </a:schemeClr>
-          </a:lnRef>
-          <a:fillRef idx="1">
-            <a:schemeClr val="accent1"/>
-          </a:fillRef>
-          <a:effectRef idx="0">
-            <a:schemeClr val="accent1"/>
-          </a:effectRef>
-          <a:fontRef idx="minor">
-            <a:schemeClr val="lt1"/>
-          </a:fontRef>
-        </p:style>
-        <p:txBody>
-          <a:bodyPr rtlCol="0" anchor="ctr"/>
-          <a:lstStyle/>
-          <a:p>
-            <a:pPr algn="ctr"/>
-            <a:endParaRPr lang="en-US"/>
-          </a:p>
-        </p:txBody>
-      </p:sp>
-      <p:sp>
-        <p:nvSpPr>
-          <p:cNvPr id="12" name="Rectangle: Rounded Corners 11">
-            <a:extLst>
-              <a:ext uri="{FF2B5EF4-FFF2-40B4-BE49-F238E27FC236}">
-                <a16:creationId xmlns:a16="http://schemas.microsoft.com/office/drawing/2014/main" id="{8011B823-CF69-0C1E-D1CE-2811B4815B0A}"/>
-              </a:ext>
-            </a:extLst>
-          </p:cNvPr>
-          <p:cNvSpPr/>
-          <p:nvPr/>
-        </p:nvSpPr>
-        <p:spPr>
-          <a:xfrm>
-            <a:off x="145606" y="142562"/>
-            <a:ext cx="403034" cy="403034"/>
-          </a:xfrm>
-          <a:prstGeom prst="roundRect">
-            <a:avLst/>
-          </a:prstGeom>
-          <a:solidFill>
-            <a:schemeClr val="bg1"/>
-          </a:solidFill>
-          <a:ln>
-            <a:noFill/>
-          </a:ln>
-        </p:spPr>
-        <p:style>
-          <a:lnRef idx="2">
-            <a:schemeClr val="accent1">
-              <a:shade val="15000"/>
-            </a:schemeClr>
-          </a:lnRef>
-          <a:fillRef idx="1">
-            <a:schemeClr val="accent1"/>
-          </a:fillRef>
-          <a:effectRef idx="0">
-            <a:schemeClr val="accent1"/>
-          </a:effectRef>
-          <a:fontRef idx="minor">
-            <a:schemeClr val="lt1"/>
-          </a:fontRef>
-        </p:style>
-        <p:txBody>
-          <a:bodyPr rtlCol="0" anchor="ctr"/>
-          <a:lstStyle/>
-          <a:p>
-            <a:pPr algn="ctr"/>
-            <a:r>
-              <a:rPr lang="ru-RU" dirty="0"/>
-              <a:t>ё</a:t>
-            </a:r>
-            <a:endParaRPr lang="en-US" dirty="0"/>
-          </a:p>
-        </p:txBody>
-      </p:sp>
-      <p:sp>
-        <p:nvSpPr>
-          <p:cNvPr id="2" name="Slide Number Placeholder 1">
-            <a:extLst>
-              <a:ext uri="{FF2B5EF4-FFF2-40B4-BE49-F238E27FC236}">
-                <a16:creationId xmlns:a16="http://schemas.microsoft.com/office/drawing/2014/main" id="{9A392AE8-5B17-1841-0A6C-1EF1AACE9577}"/>
-              </a:ext>
-            </a:extLst>
-          </p:cNvPr>
-          <p:cNvSpPr>
-            <a:spLocks noGrp="1"/>
-          </p:cNvSpPr>
-          <p:nvPr>
-            <p:ph type="sldNum" sz="quarter" idx="12"/>
-          </p:nvPr>
-        </p:nvSpPr>
-        <p:spPr>
-          <a:xfrm>
-            <a:off x="145606" y="142562"/>
-            <a:ext cx="403034" cy="403034"/>
-          </a:xfrm>
-        </p:spPr>
-        <p:txBody>
-          <a:bodyPr/>
-          <a:lstStyle/>
-          <a:p>
-            <a:pPr algn="ctr"/>
-            <a:fld id="{E484B7D4-87AC-4334-8015-F9E0E28AB063}" type="slidenum">
-              <a:rPr lang="en-US" sz="2400" smtClean="0">
-                <a:solidFill>
-                  <a:srgbClr val="222222"/>
-                </a:solidFill>
-              </a:rPr>
-              <a:pPr algn="ctr"/>
-              <a:t>6</a:t>
-            </a:fld>
-            <a:endParaRPr lang="en-US" sz="2400" dirty="0">
-              <a:solidFill>
-                <a:srgbClr val="222222"/>
-              </a:solidFill>
-            </a:endParaRPr>
-          </a:p>
-        </p:txBody>
-      </p:sp>
-    </p:spTree>
-    <p:extLst>
-      <p:ext uri="{BB962C8B-B14F-4D97-AF65-F5344CB8AC3E}">
-        <p14:creationId xmlns:p14="http://schemas.microsoft.com/office/powerpoint/2010/main" val="3798142391"/>
-      </p:ext>
-    </p:extLst>
-  </p:cSld>
-  <p:clrMapOvr>
-    <a:masterClrMapping/>
-  </p:clrMapOvr>
-</p:sld>
-</file>
-
-<file path=ppt/slides/slide7.xml><?xml version="1.0" encoding="utf-8"?>
-<p:sld xmlns:a="http://schemas.openxmlformats.org/drawingml/2006/main" xmlns:r="http://schemas.openxmlformats.org/officeDocument/2006/relationships" xmlns:p="http://schemas.openxmlformats.org/presentationml/2006/main">
-  <p:cSld>
-    <p:spTree>
-      <p:nvGrpSpPr>
-        <p:cNvPr id="1" name="">
-          <a:extLst>
-            <a:ext uri="{FF2B5EF4-FFF2-40B4-BE49-F238E27FC236}">
-              <a16:creationId xmlns:a16="http://schemas.microsoft.com/office/drawing/2014/main" id="{F0307F7F-12B3-82F6-B5D5-6F09083B6960}"/>
-            </a:ext>
-          </a:extLst>
-        </p:cNvPr>
-        <p:cNvGrpSpPr/>
-        <p:nvPr/>
-      </p:nvGrpSpPr>
-      <p:grpSpPr>
-        <a:xfrm>
-          <a:off x="0" y="0"/>
-          <a:ext cx="0" cy="0"/>
-          <a:chOff x="0" y="0"/>
-          <a:chExt cx="0" cy="0"/>
-        </a:xfrm>
-      </p:grpSpPr>
-      <p:sp>
-        <p:nvSpPr>
-          <p:cNvPr id="9" name="Rectangle 8">
-            <a:extLst>
-              <a:ext uri="{FF2B5EF4-FFF2-40B4-BE49-F238E27FC236}">
-                <a16:creationId xmlns:a16="http://schemas.microsoft.com/office/drawing/2014/main" id="{28FDE085-0E97-60A2-7531-C0BB37A79494}"/>
-              </a:ext>
-            </a:extLst>
-          </p:cNvPr>
-          <p:cNvSpPr/>
-          <p:nvPr/>
-        </p:nvSpPr>
-        <p:spPr>
-          <a:xfrm>
-            <a:off x="0" y="0"/>
-            <a:ext cx="12192000" cy="688157"/>
-          </a:xfrm>
-          <a:prstGeom prst="rect">
-            <a:avLst/>
-          </a:prstGeom>
-          <a:solidFill>
-            <a:srgbClr val="222222"/>
-          </a:solidFill>
-          <a:ln>
-            <a:noFill/>
-          </a:ln>
-        </p:spPr>
-        <p:style>
-          <a:lnRef idx="2">
-            <a:schemeClr val="accent1">
-              <a:shade val="15000"/>
-            </a:schemeClr>
-          </a:lnRef>
-          <a:fillRef idx="1">
-            <a:schemeClr val="accent1"/>
-          </a:fillRef>
-          <a:effectRef idx="0">
-            <a:schemeClr val="accent1"/>
-          </a:effectRef>
-          <a:fontRef idx="minor">
-            <a:schemeClr val="lt1"/>
-          </a:fontRef>
-        </p:style>
-        <p:txBody>
-          <a:bodyPr rtlCol="0" anchor="ctr"/>
-          <a:lstStyle/>
-          <a:p>
-            <a:pPr algn="ctr"/>
-            <a:endParaRPr lang="en-US"/>
-          </a:p>
-        </p:txBody>
-      </p:sp>
-      <p:sp>
-        <p:nvSpPr>
-          <p:cNvPr id="12" name="Rectangle: Rounded Corners 11">
-            <a:extLst>
-              <a:ext uri="{FF2B5EF4-FFF2-40B4-BE49-F238E27FC236}">
-                <a16:creationId xmlns:a16="http://schemas.microsoft.com/office/drawing/2014/main" id="{4A65B33F-296C-C6AC-94D2-BB4BD4F0CD20}"/>
-              </a:ext>
-            </a:extLst>
-          </p:cNvPr>
-          <p:cNvSpPr/>
-          <p:nvPr/>
-        </p:nvSpPr>
-        <p:spPr>
-          <a:xfrm>
-            <a:off x="145606" y="142562"/>
-            <a:ext cx="403034" cy="403034"/>
-          </a:xfrm>
-          <a:prstGeom prst="roundRect">
-            <a:avLst/>
-          </a:prstGeom>
-          <a:solidFill>
-            <a:schemeClr val="bg1"/>
-          </a:solidFill>
-          <a:ln>
-            <a:noFill/>
-          </a:ln>
-        </p:spPr>
-        <p:style>
-          <a:lnRef idx="2">
-            <a:schemeClr val="accent1">
-              <a:shade val="15000"/>
-            </a:schemeClr>
-          </a:lnRef>
-          <a:fillRef idx="1">
-            <a:schemeClr val="accent1"/>
-          </a:fillRef>
-          <a:effectRef idx="0">
-            <a:schemeClr val="accent1"/>
-          </a:effectRef>
-          <a:fontRef idx="minor">
-            <a:schemeClr val="lt1"/>
-          </a:fontRef>
-        </p:style>
-        <p:txBody>
-          <a:bodyPr rtlCol="0" anchor="ctr"/>
-          <a:lstStyle/>
-          <a:p>
-            <a:pPr algn="ctr"/>
-            <a:r>
-              <a:rPr lang="ru-RU" dirty="0"/>
-              <a:t>ё</a:t>
-            </a:r>
-            <a:endParaRPr lang="en-US" dirty="0"/>
-          </a:p>
-        </p:txBody>
-      </p:sp>
-      <p:sp>
-        <p:nvSpPr>
-          <p:cNvPr id="2" name="Slide Number Placeholder 1">
-            <a:extLst>
-              <a:ext uri="{FF2B5EF4-FFF2-40B4-BE49-F238E27FC236}">
-                <a16:creationId xmlns:a16="http://schemas.microsoft.com/office/drawing/2014/main" id="{8990B24B-C0C1-746A-5611-07567C15162F}"/>
-              </a:ext>
-            </a:extLst>
-          </p:cNvPr>
-          <p:cNvSpPr>
-            <a:spLocks noGrp="1"/>
-          </p:cNvSpPr>
-          <p:nvPr>
-            <p:ph type="sldNum" sz="quarter" idx="12"/>
-          </p:nvPr>
-        </p:nvSpPr>
-        <p:spPr>
-          <a:xfrm>
-            <a:off x="145606" y="142562"/>
-            <a:ext cx="403034" cy="403034"/>
-          </a:xfrm>
-        </p:spPr>
-        <p:txBody>
-          <a:bodyPr/>
-          <a:lstStyle/>
-          <a:p>
-            <a:pPr algn="ctr"/>
-            <a:fld id="{E484B7D4-87AC-4334-8015-F9E0E28AB063}" type="slidenum">
-              <a:rPr lang="en-US" sz="2400" smtClean="0">
-                <a:solidFill>
-                  <a:srgbClr val="222222"/>
-                </a:solidFill>
-              </a:rPr>
-              <a:pPr algn="ctr"/>
-              <a:t>7</a:t>
-            </a:fld>
-            <a:endParaRPr lang="en-US" sz="2400" dirty="0">
-              <a:solidFill>
-                <a:srgbClr val="222222"/>
-              </a:solidFill>
-            </a:endParaRPr>
-          </a:p>
-        </p:txBody>
-      </p:sp>
-    </p:spTree>
-    <p:extLst>
-      <p:ext uri="{BB962C8B-B14F-4D97-AF65-F5344CB8AC3E}">
-        <p14:creationId xmlns:p14="http://schemas.microsoft.com/office/powerpoint/2010/main" val="1456142563"/>
-      </p:ext>
-    </p:extLst>
-  </p:cSld>
-  <p:clrMapOvr>
-    <a:masterClrMapping/>
-  </p:clrMapOvr>
-</p:sld>
-</file>
-
-<file path=ppt/slides/slide8.xml><?xml version="1.0" encoding="utf-8"?>
-<p:sld xmlns:a="http://schemas.openxmlformats.org/drawingml/2006/main" xmlns:r="http://schemas.openxmlformats.org/officeDocument/2006/relationships" xmlns:p="http://schemas.openxmlformats.org/presentationml/2006/main">
-  <p:cSld>
-    <p:spTree>
-      <p:nvGrpSpPr>
-        <p:cNvPr id="1" name="">
-          <a:extLst>
-            <a:ext uri="{FF2B5EF4-FFF2-40B4-BE49-F238E27FC236}">
-              <a16:creationId xmlns:a16="http://schemas.microsoft.com/office/drawing/2014/main" id="{8CD4DF09-A904-DD09-AF21-FF3962709D2E}"/>
-            </a:ext>
-          </a:extLst>
-        </p:cNvPr>
-        <p:cNvGrpSpPr/>
-        <p:nvPr/>
-      </p:nvGrpSpPr>
-      <p:grpSpPr>
-        <a:xfrm>
-          <a:off x="0" y="0"/>
-          <a:ext cx="0" cy="0"/>
-          <a:chOff x="0" y="0"/>
-          <a:chExt cx="0" cy="0"/>
-        </a:xfrm>
-      </p:grpSpPr>
-      <p:sp>
-        <p:nvSpPr>
-          <p:cNvPr id="9" name="Rectangle 8">
-            <a:extLst>
-              <a:ext uri="{FF2B5EF4-FFF2-40B4-BE49-F238E27FC236}">
-                <a16:creationId xmlns:a16="http://schemas.microsoft.com/office/drawing/2014/main" id="{CBA190DD-1BD7-CA00-FD7C-8845F6928ED7}"/>
-              </a:ext>
-            </a:extLst>
-          </p:cNvPr>
-          <p:cNvSpPr/>
-          <p:nvPr/>
-        </p:nvSpPr>
-        <p:spPr>
-          <a:xfrm>
-            <a:off x="0" y="0"/>
-            <a:ext cx="12192000" cy="688157"/>
-          </a:xfrm>
-          <a:prstGeom prst="rect">
-            <a:avLst/>
-          </a:prstGeom>
-          <a:solidFill>
-            <a:srgbClr val="222222"/>
-          </a:solidFill>
-          <a:ln>
-            <a:noFill/>
-          </a:ln>
-        </p:spPr>
-        <p:style>
-          <a:lnRef idx="2">
-            <a:schemeClr val="accent1">
-              <a:shade val="15000"/>
-            </a:schemeClr>
-          </a:lnRef>
-          <a:fillRef idx="1">
-            <a:schemeClr val="accent1"/>
-          </a:fillRef>
-          <a:effectRef idx="0">
-            <a:schemeClr val="accent1"/>
-          </a:effectRef>
-          <a:fontRef idx="minor">
-            <a:schemeClr val="lt1"/>
-          </a:fontRef>
-        </p:style>
-        <p:txBody>
-          <a:bodyPr rtlCol="0" anchor="ctr"/>
-          <a:lstStyle/>
-          <a:p>
-            <a:pPr algn="ctr"/>
-            <a:endParaRPr lang="en-US"/>
-          </a:p>
-        </p:txBody>
-      </p:sp>
-      <p:sp>
-        <p:nvSpPr>
-          <p:cNvPr id="12" name="Rectangle: Rounded Corners 11">
-            <a:extLst>
-              <a:ext uri="{FF2B5EF4-FFF2-40B4-BE49-F238E27FC236}">
-                <a16:creationId xmlns:a16="http://schemas.microsoft.com/office/drawing/2014/main" id="{E61F83F8-F620-2D15-ADA6-24AC55178558}"/>
-              </a:ext>
-            </a:extLst>
-          </p:cNvPr>
-          <p:cNvSpPr/>
-          <p:nvPr/>
-        </p:nvSpPr>
-        <p:spPr>
-          <a:xfrm>
-            <a:off x="145606" y="142562"/>
-            <a:ext cx="403034" cy="403034"/>
-          </a:xfrm>
-          <a:prstGeom prst="roundRect">
-            <a:avLst/>
-          </a:prstGeom>
-          <a:solidFill>
-            <a:schemeClr val="bg1"/>
-          </a:solidFill>
-          <a:ln>
-            <a:noFill/>
-          </a:ln>
-        </p:spPr>
-        <p:style>
-          <a:lnRef idx="2">
-            <a:schemeClr val="accent1">
-              <a:shade val="15000"/>
-            </a:schemeClr>
-          </a:lnRef>
-          <a:fillRef idx="1">
-            <a:schemeClr val="accent1"/>
-          </a:fillRef>
-          <a:effectRef idx="0">
-            <a:schemeClr val="accent1"/>
-          </a:effectRef>
-          <a:fontRef idx="minor">
-            <a:schemeClr val="lt1"/>
-          </a:fontRef>
-        </p:style>
-        <p:txBody>
-          <a:bodyPr rtlCol="0" anchor="ctr"/>
-          <a:lstStyle/>
-          <a:p>
-            <a:pPr algn="ctr"/>
-            <a:r>
-              <a:rPr lang="ru-RU" dirty="0"/>
-              <a:t>ё</a:t>
-            </a:r>
-            <a:endParaRPr lang="en-US" dirty="0"/>
-          </a:p>
-        </p:txBody>
-      </p:sp>
-      <p:sp>
-        <p:nvSpPr>
-          <p:cNvPr id="2" name="Slide Number Placeholder 1">
-            <a:extLst>
-              <a:ext uri="{FF2B5EF4-FFF2-40B4-BE49-F238E27FC236}">
-                <a16:creationId xmlns:a16="http://schemas.microsoft.com/office/drawing/2014/main" id="{E3683E80-AF34-C154-01BE-B5341BC93EB2}"/>
-              </a:ext>
-            </a:extLst>
-          </p:cNvPr>
-          <p:cNvSpPr>
-            <a:spLocks noGrp="1"/>
-          </p:cNvSpPr>
-          <p:nvPr>
-            <p:ph type="sldNum" sz="quarter" idx="12"/>
-          </p:nvPr>
-        </p:nvSpPr>
-        <p:spPr>
-          <a:xfrm>
-            <a:off x="145606" y="142562"/>
-            <a:ext cx="403034" cy="403034"/>
-          </a:xfrm>
-        </p:spPr>
-        <p:txBody>
-          <a:bodyPr/>
-          <a:lstStyle/>
-          <a:p>
-            <a:pPr algn="ctr"/>
-            <a:fld id="{E484B7D4-87AC-4334-8015-F9E0E28AB063}" type="slidenum">
-              <a:rPr lang="en-US" sz="2400" smtClean="0">
-                <a:solidFill>
-                  <a:srgbClr val="222222"/>
-                </a:solidFill>
-              </a:rPr>
-              <a:pPr algn="ctr"/>
               <a:t>8</a:t>
             </a:fld>
             <a:endParaRPr lang="en-US" sz="2400" dirty="0">
@@ -5786,7 +6714,7 @@
     </p:spTree>
     <p:extLst>
       <p:ext uri="{BB962C8B-B14F-4D97-AF65-F5344CB8AC3E}">
-        <p14:creationId xmlns:p14="http://schemas.microsoft.com/office/powerpoint/2010/main" val="319574929"/>
+        <p14:creationId xmlns:p14="http://schemas.microsoft.com/office/powerpoint/2010/main" val="4062801928"/>
       </p:ext>
     </p:extLst>
   </p:cSld>
@@ -5804,7 +6732,7 @@
         <p:cNvPr id="1" name="">
           <a:extLst>
             <a:ext uri="{FF2B5EF4-FFF2-40B4-BE49-F238E27FC236}">
-              <a16:creationId xmlns:a16="http://schemas.microsoft.com/office/drawing/2014/main" id="{DDA6A203-9264-AF20-8F10-100D9FD4A7AA}"/>
+              <a16:creationId xmlns:a16="http://schemas.microsoft.com/office/drawing/2014/main" id="{7B0B5728-26B6-D764-94C9-661370165235}"/>
             </a:ext>
           </a:extLst>
         </p:cNvPr>
@@ -5824,7 +6752,7 @@
           <p:cNvPr id="9" name="Rectangle 8">
             <a:extLst>
               <a:ext uri="{FF2B5EF4-FFF2-40B4-BE49-F238E27FC236}">
-                <a16:creationId xmlns:a16="http://schemas.microsoft.com/office/drawing/2014/main" id="{12F6115D-FF31-D268-91C5-9CC6D99A86BF}"/>
+                <a16:creationId xmlns:a16="http://schemas.microsoft.com/office/drawing/2014/main" id="{231D96A2-4C66-C568-43CB-09CA841D0915}"/>
               </a:ext>
             </a:extLst>
           </p:cNvPr>
@@ -5869,9 +6797,12 @@
             <a:pPr algn="ctr"/>
             <a:r>
               <a:rPr lang="ru-RU" sz="3200" dirty="0"/>
-              <a:t>Следующие шаги</a:t>
-            </a:r>
-            <a:endParaRPr lang="en-US" sz="3200" dirty="0"/>
+              <a:t>Запускаем </a:t>
+            </a:r>
+            <a:r>
+              <a:rPr lang="en-US" sz="3200" dirty="0"/>
+              <a:t>RAG!</a:t>
+            </a:r>
           </a:p>
         </p:txBody>
       </p:sp>
@@ -5880,7 +6811,7 @@
           <p:cNvPr id="12" name="Rectangle: Rounded Corners 11">
             <a:extLst>
               <a:ext uri="{FF2B5EF4-FFF2-40B4-BE49-F238E27FC236}">
-                <a16:creationId xmlns:a16="http://schemas.microsoft.com/office/drawing/2014/main" id="{7634B364-113E-9A12-7B2B-C53CB05D4B93}"/>
+                <a16:creationId xmlns:a16="http://schemas.microsoft.com/office/drawing/2014/main" id="{386F492E-43BE-8E92-6719-F7CBEC5A6B2F}"/>
               </a:ext>
             </a:extLst>
           </p:cNvPr>
@@ -5936,7 +6867,7 @@
           <p:cNvPr id="2" name="Slide Number Placeholder 1">
             <a:extLst>
               <a:ext uri="{FF2B5EF4-FFF2-40B4-BE49-F238E27FC236}">
-                <a16:creationId xmlns:a16="http://schemas.microsoft.com/office/drawing/2014/main" id="{01272CEE-C0F2-F2FE-07D8-5D653DC41D58}"/>
+                <a16:creationId xmlns:a16="http://schemas.microsoft.com/office/drawing/2014/main" id="{D658953F-CEE9-9F4C-E3A3-2B4AEB4CFCB5}"/>
               </a:ext>
             </a:extLst>
           </p:cNvPr>
@@ -5978,7 +6909,7 @@
     </p:spTree>
     <p:extLst>
       <p:ext uri="{BB962C8B-B14F-4D97-AF65-F5344CB8AC3E}">
-        <p14:creationId xmlns:p14="http://schemas.microsoft.com/office/powerpoint/2010/main" val="1733612834"/>
+        <p14:creationId xmlns:p14="http://schemas.microsoft.com/office/powerpoint/2010/main" val="3587918913"/>
       </p:ext>
     </p:extLst>
   </p:cSld>

--- a/arXiv_Presentation.pptx
+++ b/arXiv_Presentation.pptx
@@ -5,10 +5,10 @@
     <p:sldMasterId id="2147483648" r:id="rId1"/>
   </p:sldMasterIdLst>
   <p:notesMasterIdLst>
-    <p:notesMasterId r:id="rId16"/>
+    <p:notesMasterId r:id="rId13"/>
   </p:notesMasterIdLst>
   <p:handoutMasterIdLst>
-    <p:handoutMasterId r:id="rId17"/>
+    <p:handoutMasterId r:id="rId14"/>
   </p:handoutMasterIdLst>
   <p:sldIdLst>
     <p:sldId id="256" r:id="rId2"/>
@@ -22,9 +22,6 @@
     <p:sldId id="265" r:id="rId10"/>
     <p:sldId id="266" r:id="rId11"/>
     <p:sldId id="264" r:id="rId12"/>
-    <p:sldId id="268" r:id="rId13"/>
-    <p:sldId id="267" r:id="rId14"/>
-    <p:sldId id="269" r:id="rId15"/>
   </p:sldIdLst>
   <p:sldSz cx="12192000" cy="6858000"/>
   <p:notesSz cx="6858000" cy="9144000"/>
@@ -4503,6 +4500,116 @@
           </a:p>
         </p:txBody>
       </p:sp>
+      <p:sp>
+        <p:nvSpPr>
+          <p:cNvPr id="3" name="TextBox 2">
+            <a:extLst>
+              <a:ext uri="{FF2B5EF4-FFF2-40B4-BE49-F238E27FC236}">
+                <a16:creationId xmlns:a16="http://schemas.microsoft.com/office/drawing/2014/main" id="{47CDC9CA-703C-ED8A-5B25-A5D12EDF16A2}"/>
+              </a:ext>
+            </a:extLst>
+          </p:cNvPr>
+          <p:cNvSpPr txBox="1"/>
+          <p:nvPr/>
+        </p:nvSpPr>
+        <p:spPr>
+          <a:xfrm>
+            <a:off x="1887597" y="2551837"/>
+            <a:ext cx="7697172" cy="2308324"/>
+          </a:xfrm>
+          <a:prstGeom prst="rect">
+            <a:avLst/>
+          </a:prstGeom>
+          <a:noFill/>
+        </p:spPr>
+        <p:txBody>
+          <a:bodyPr wrap="none" rtlCol="0">
+            <a:spAutoFit/>
+          </a:bodyPr>
+          <a:lstStyle/>
+          <a:p>
+            <a:r>
+              <a:rPr lang="ru-RU" dirty="0"/>
+              <a:t>Визуал:</a:t>
+            </a:r>
+          </a:p>
+          <a:p>
+            <a:r>
+              <a:rPr lang="ru-RU" dirty="0"/>
+              <a:t>Радарная диаграмма (</a:t>
+            </a:r>
+            <a:r>
+              <a:rPr lang="ru-RU" dirty="0" err="1"/>
+              <a:t>spider</a:t>
+            </a:r>
+            <a:r>
+              <a:rPr lang="ru-RU" dirty="0"/>
+              <a:t> </a:t>
+            </a:r>
+            <a:r>
+              <a:rPr lang="ru-RU" dirty="0" err="1"/>
+              <a:t>chart</a:t>
+            </a:r>
+            <a:r>
+              <a:rPr lang="ru-RU" dirty="0"/>
+              <a:t>) или 4 прогресс-бара с метриками RAGAS.</a:t>
+            </a:r>
+          </a:p>
+          <a:p>
+            <a:endParaRPr lang="ru-RU" dirty="0"/>
+          </a:p>
+          <a:p>
+            <a:r>
+              <a:rPr lang="ru-RU" dirty="0"/>
+              <a:t>Текст:</a:t>
+            </a:r>
+          </a:p>
+          <a:p>
+            <a:r>
+              <a:rPr lang="en-US" b="1" dirty="0"/>
+              <a:t>Context Precision:</a:t>
+            </a:r>
+            <a:r>
+              <a:rPr lang="en-US" dirty="0"/>
+              <a:t> 0.54.</a:t>
+            </a:r>
+            <a:endParaRPr lang="ru-RU" dirty="0"/>
+          </a:p>
+          <a:p>
+            <a:r>
+              <a:rPr lang="en-US" b="1" dirty="0"/>
+              <a:t>Context Recall:</a:t>
+            </a:r>
+            <a:r>
+              <a:rPr lang="en-US" dirty="0"/>
+              <a:t> 0.75.</a:t>
+            </a:r>
+            <a:endParaRPr lang="ru-RU" dirty="0"/>
+          </a:p>
+          <a:p>
+            <a:r>
+              <a:rPr lang="en-US" b="1" dirty="0"/>
+              <a:t>Answer Relevancy:</a:t>
+            </a:r>
+            <a:r>
+              <a:rPr lang="en-US" dirty="0"/>
+              <a:t> 0.77.</a:t>
+            </a:r>
+            <a:endParaRPr lang="ru-RU" dirty="0"/>
+          </a:p>
+          <a:p>
+            <a:r>
+              <a:rPr lang="en-US" b="1" dirty="0"/>
+              <a:t>Faithfulness:</a:t>
+            </a:r>
+            <a:r>
+              <a:rPr lang="en-US" dirty="0"/>
+              <a:t> 0.70.</a:t>
+            </a:r>
+            <a:endParaRPr lang="ru-RU" dirty="0"/>
+          </a:p>
+        </p:txBody>
+      </p:sp>
     </p:spTree>
     <p:extLst>
       <p:ext uri="{BB962C8B-B14F-4D97-AF65-F5344CB8AC3E}">
@@ -4709,8 +4816,8 @@
         </p:nvSpPr>
         <p:spPr>
           <a:xfrm>
-            <a:off x="2838698" y="2644170"/>
-            <a:ext cx="6514604" cy="2308324"/>
+            <a:off x="1489435" y="2804426"/>
+            <a:ext cx="10140084" cy="1569660"/>
           </a:xfrm>
           <a:prstGeom prst="rect">
             <a:avLst/>
@@ -4728,8 +4835,12 @@
               <a:buChar char="•"/>
             </a:pPr>
             <a:r>
-              <a:rPr lang="en-US" sz="2400" dirty="0"/>
-              <a:t>Dense + Sparse Vector search (Cosine + BM25)</a:t>
+              <a:rPr lang="ru-RU" sz="2400" b="1" dirty="0"/>
+              <a:t>Hybrid Search:</a:t>
+            </a:r>
+            <a:r>
+              <a:rPr lang="ru-RU" sz="2400" dirty="0"/>
+              <a:t> Внедрение разреженного поиска (BM25).</a:t>
             </a:r>
           </a:p>
           <a:p>
@@ -4738,16 +4849,24 @@
               <a:buChar char="•"/>
             </a:pPr>
             <a:r>
+              <a:rPr lang="ru-RU" sz="2400" b="1" dirty="0" err="1"/>
+              <a:t>Reranker</a:t>
+            </a:r>
+            <a:r>
+              <a:rPr lang="ru-RU" sz="2400" b="1" dirty="0"/>
+              <a:t>:</a:t>
+            </a:r>
+            <a:r>
               <a:rPr lang="ru-RU" sz="2400" dirty="0"/>
-              <a:t>Ранжирование результатов поиска (</a:t>
+              <a:t> Повышение точности выдачи через этап </a:t>
             </a:r>
             <a:r>
               <a:rPr lang="ru-RU" sz="2400" dirty="0" err="1"/>
-              <a:t>Реранкер</a:t>
+              <a:t>переранжирования</a:t>
             </a:r>
             <a:r>
               <a:rPr lang="ru-RU" sz="2400" dirty="0"/>
-              <a:t>)</a:t>
+              <a:t>.</a:t>
             </a:r>
           </a:p>
           <a:p>
@@ -4756,8 +4875,32 @@
               <a:buChar char="•"/>
             </a:pPr>
             <a:r>
+              <a:rPr lang="ru-RU" sz="2400" b="1" dirty="0" err="1"/>
+              <a:t>Reasoning</a:t>
+            </a:r>
+            <a:r>
+              <a:rPr lang="ru-RU" sz="2400" b="1" dirty="0"/>
+              <a:t>:</a:t>
+            </a:r>
+            <a:r>
               <a:rPr lang="ru-RU" sz="2400" dirty="0"/>
-              <a:t>Совершенствование эталонного датасета</a:t>
+              <a:t> Интеграция рассуждающих моделей (</a:t>
+            </a:r>
+            <a:r>
+              <a:rPr lang="ru-RU" sz="2400" dirty="0" err="1"/>
+              <a:t>Reasoning</a:t>
+            </a:r>
+            <a:r>
+              <a:rPr lang="ru-RU" sz="2400" dirty="0"/>
+              <a:t> </a:t>
+            </a:r>
+            <a:r>
+              <a:rPr lang="ru-RU" sz="2400" dirty="0" err="1"/>
+              <a:t>generator</a:t>
+            </a:r>
+            <a:r>
+              <a:rPr lang="ru-RU" sz="2400" dirty="0"/>
+              <a:t>).</a:t>
             </a:r>
           </a:p>
           <a:p>
@@ -4766,41 +4909,74 @@
               <a:buChar char="•"/>
             </a:pPr>
             <a:r>
+              <a:rPr lang="ru-RU" sz="2400" b="1" dirty="0" err="1"/>
+              <a:t>GraphRAG</a:t>
+            </a:r>
+            <a:r>
+              <a:rPr lang="ru-RU" sz="2400" b="1" dirty="0"/>
+              <a:t>:</a:t>
+            </a:r>
+            <a:r>
               <a:rPr lang="ru-RU" sz="2400" dirty="0"/>
-              <a:t>Использовать </a:t>
-            </a:r>
-            <a:r>
-              <a:rPr lang="en-US" sz="2400" dirty="0"/>
-              <a:t>Reasoning </a:t>
+              <a:t> Переход к </a:t>
+            </a:r>
+            <a:r>
+              <a:rPr lang="ru-RU" sz="2400" dirty="0" err="1"/>
+              <a:t>графовым</a:t>
             </a:r>
             <a:r>
               <a:rPr lang="ru-RU" sz="2400" dirty="0"/>
-              <a:t>генератор</a:t>
-            </a:r>
-          </a:p>
-          <a:p>
-            <a:pPr marL="285750" indent="-285750">
-              <a:buFont typeface="Arial" panose="020B0604020202020204" pitchFamily="34" charset="0"/>
-              <a:buChar char="•"/>
-            </a:pPr>
-            <a:r>
-              <a:rPr lang="en-US" sz="2400" dirty="0"/>
-              <a:t>Graph RAG</a:t>
-            </a:r>
-          </a:p>
-          <a:p>
-            <a:pPr marL="285750" indent="-285750">
-              <a:buFont typeface="Arial" panose="020B0604020202020204" pitchFamily="34" charset="0"/>
-              <a:buChar char="•"/>
-            </a:pPr>
-            <a:r>
-              <a:rPr lang="ru-RU" sz="2400" dirty="0"/>
-              <a:t>Создать диалоговый формат общения с </a:t>
-            </a:r>
-            <a:r>
-              <a:rPr lang="en-US" sz="2400" dirty="0"/>
-              <a:t>RAG</a:t>
-            </a:r>
+              <a:t> представлениям связей между статьями.</a:t>
+            </a:r>
+            <a:endParaRPr lang="en-US" sz="2400" dirty="0"/>
+          </a:p>
+        </p:txBody>
+      </p:sp>
+      <p:sp>
+        <p:nvSpPr>
+          <p:cNvPr id="5" name="TextBox 4">
+            <a:extLst>
+              <a:ext uri="{FF2B5EF4-FFF2-40B4-BE49-F238E27FC236}">
+                <a16:creationId xmlns:a16="http://schemas.microsoft.com/office/drawing/2014/main" id="{008AC30F-A8BE-7CA9-4A2E-5F1E98ED8B63}"/>
+              </a:ext>
+            </a:extLst>
+          </p:cNvPr>
+          <p:cNvSpPr txBox="1"/>
+          <p:nvPr/>
+        </p:nvSpPr>
+        <p:spPr>
+          <a:xfrm>
+            <a:off x="3512263" y="1686554"/>
+            <a:ext cx="6094428" cy="369332"/>
+          </a:xfrm>
+          <a:prstGeom prst="rect">
+            <a:avLst/>
+          </a:prstGeom>
+          <a:noFill/>
+        </p:spPr>
+        <p:txBody>
+          <a:bodyPr wrap="square">
+            <a:spAutoFit/>
+          </a:bodyPr>
+          <a:lstStyle/>
+          <a:p>
+            <a:r>
+              <a:rPr lang="ru-RU" b="1" dirty="0"/>
+              <a:t>Визуал:</a:t>
+            </a:r>
+            <a:r>
+              <a:rPr lang="ru-RU" dirty="0"/>
+              <a:t> Иконка «дорожной карты» (</a:t>
+            </a:r>
+            <a:r>
+              <a:rPr lang="ru-RU" dirty="0" err="1"/>
+              <a:t>Roadmap</a:t>
+            </a:r>
+            <a:r>
+              <a:rPr lang="ru-RU" dirty="0"/>
+              <a:t>).</a:t>
+            </a:r>
+            <a:endParaRPr lang="en-US" dirty="0"/>
           </a:p>
         </p:txBody>
       </p:sp>
@@ -4808,569 +4984,6 @@
     <p:extLst>
       <p:ext uri="{BB962C8B-B14F-4D97-AF65-F5344CB8AC3E}">
         <p14:creationId xmlns:p14="http://schemas.microsoft.com/office/powerpoint/2010/main" val="1733612834"/>
-      </p:ext>
-    </p:extLst>
-  </p:cSld>
-  <p:clrMapOvr>
-    <a:masterClrMapping/>
-  </p:clrMapOvr>
-</p:sld>
-</file>
-
-<file path=ppt/slides/slide12.xml><?xml version="1.0" encoding="utf-8"?>
-<p:sld xmlns:a="http://schemas.openxmlformats.org/drawingml/2006/main" xmlns:r="http://schemas.openxmlformats.org/officeDocument/2006/relationships" xmlns:p="http://schemas.openxmlformats.org/presentationml/2006/main">
-  <p:cSld>
-    <p:spTree>
-      <p:nvGrpSpPr>
-        <p:cNvPr id="1" name="">
-          <a:extLst>
-            <a:ext uri="{FF2B5EF4-FFF2-40B4-BE49-F238E27FC236}">
-              <a16:creationId xmlns:a16="http://schemas.microsoft.com/office/drawing/2014/main" id="{16643BF1-ECA3-4E2B-1838-95469C69291B}"/>
-            </a:ext>
-          </a:extLst>
-        </p:cNvPr>
-        <p:cNvGrpSpPr/>
-        <p:nvPr/>
-      </p:nvGrpSpPr>
-      <p:grpSpPr>
-        <a:xfrm>
-          <a:off x="0" y="0"/>
-          <a:ext cx="0" cy="0"/>
-          <a:chOff x="0" y="0"/>
-          <a:chExt cx="0" cy="0"/>
-        </a:xfrm>
-      </p:grpSpPr>
-      <p:sp>
-        <p:nvSpPr>
-          <p:cNvPr id="9" name="Rectangle 8">
-            <a:extLst>
-              <a:ext uri="{FF2B5EF4-FFF2-40B4-BE49-F238E27FC236}">
-                <a16:creationId xmlns:a16="http://schemas.microsoft.com/office/drawing/2014/main" id="{605A2787-45F5-5869-0A1E-2BBB6ADB1689}"/>
-              </a:ext>
-            </a:extLst>
-          </p:cNvPr>
-          <p:cNvSpPr/>
-          <p:nvPr/>
-        </p:nvSpPr>
-        <p:spPr>
-          <a:xfrm>
-            <a:off x="0" y="0"/>
-            <a:ext cx="12192000" cy="688157"/>
-          </a:xfrm>
-          <a:prstGeom prst="rect">
-            <a:avLst/>
-          </a:prstGeom>
-          <a:solidFill>
-            <a:srgbClr val="222222"/>
-          </a:solidFill>
-          <a:ln>
-            <a:noFill/>
-          </a:ln>
-        </p:spPr>
-        <p:style>
-          <a:lnRef idx="2">
-            <a:schemeClr val="accent1">
-              <a:shade val="15000"/>
-            </a:schemeClr>
-          </a:lnRef>
-          <a:fillRef idx="1">
-            <a:schemeClr val="accent1"/>
-          </a:fillRef>
-          <a:effectRef idx="0">
-            <a:schemeClr val="accent1"/>
-          </a:effectRef>
-          <a:fontRef idx="minor">
-            <a:schemeClr val="lt1"/>
-          </a:fontRef>
-        </p:style>
-        <p:txBody>
-          <a:bodyPr rtlCol="0" anchor="ctr"/>
-          <a:lstStyle/>
-          <a:p>
-            <a:pPr algn="ctr"/>
-            <a:endParaRPr lang="en-US"/>
-          </a:p>
-        </p:txBody>
-      </p:sp>
-      <p:sp>
-        <p:nvSpPr>
-          <p:cNvPr id="12" name="Rectangle: Rounded Corners 11">
-            <a:extLst>
-              <a:ext uri="{FF2B5EF4-FFF2-40B4-BE49-F238E27FC236}">
-                <a16:creationId xmlns:a16="http://schemas.microsoft.com/office/drawing/2014/main" id="{65001F3F-E764-2343-4AD9-8B3F243F27A4}"/>
-              </a:ext>
-            </a:extLst>
-          </p:cNvPr>
-          <p:cNvSpPr/>
-          <p:nvPr/>
-        </p:nvSpPr>
-        <p:spPr>
-          <a:xfrm>
-            <a:off x="145606" y="142562"/>
-            <a:ext cx="403034" cy="403034"/>
-          </a:xfrm>
-          <a:prstGeom prst="roundRect">
-            <a:avLst/>
-          </a:prstGeom>
-          <a:solidFill>
-            <a:schemeClr val="bg1"/>
-          </a:solidFill>
-          <a:ln>
-            <a:noFill/>
-          </a:ln>
-        </p:spPr>
-        <p:style>
-          <a:lnRef idx="2">
-            <a:schemeClr val="accent1">
-              <a:shade val="15000"/>
-            </a:schemeClr>
-          </a:lnRef>
-          <a:fillRef idx="1">
-            <a:schemeClr val="accent1"/>
-          </a:fillRef>
-          <a:effectRef idx="0">
-            <a:schemeClr val="accent1"/>
-          </a:effectRef>
-          <a:fontRef idx="minor">
-            <a:schemeClr val="lt1"/>
-          </a:fontRef>
-        </p:style>
-        <p:txBody>
-          <a:bodyPr rtlCol="0" anchor="ctr"/>
-          <a:lstStyle/>
-          <a:p>
-            <a:pPr algn="ctr"/>
-            <a:r>
-              <a:rPr lang="ru-RU" dirty="0"/>
-              <a:t>ё</a:t>
-            </a:r>
-            <a:endParaRPr lang="en-US" dirty="0"/>
-          </a:p>
-        </p:txBody>
-      </p:sp>
-      <p:sp>
-        <p:nvSpPr>
-          <p:cNvPr id="2" name="Slide Number Placeholder 1">
-            <a:extLst>
-              <a:ext uri="{FF2B5EF4-FFF2-40B4-BE49-F238E27FC236}">
-                <a16:creationId xmlns:a16="http://schemas.microsoft.com/office/drawing/2014/main" id="{E16CECF1-510F-9004-9844-9D5804315CD9}"/>
-              </a:ext>
-            </a:extLst>
-          </p:cNvPr>
-          <p:cNvSpPr>
-            <a:spLocks noGrp="1"/>
-          </p:cNvSpPr>
-          <p:nvPr>
-            <p:ph type="sldNum" sz="quarter" idx="12"/>
-          </p:nvPr>
-        </p:nvSpPr>
-        <p:spPr>
-          <a:xfrm>
-            <a:off x="145606" y="142562"/>
-            <a:ext cx="403034" cy="403034"/>
-          </a:xfrm>
-        </p:spPr>
-        <p:txBody>
-          <a:bodyPr/>
-          <a:lstStyle/>
-          <a:p>
-            <a:pPr algn="ctr"/>
-            <a:fld id="{97CD60CB-F48F-49AC-AD8C-779680B82E32}" type="slidenum">
-              <a:rPr lang="en-US" sz="1600" smtClean="0">
-                <a:solidFill>
-                  <a:srgbClr val="222222"/>
-                </a:solidFill>
-              </a:rPr>
-              <a:t>12</a:t>
-            </a:fld>
-            <a:endParaRPr lang="en-US" sz="1600" dirty="0">
-              <a:solidFill>
-                <a:srgbClr val="222222"/>
-              </a:solidFill>
-            </a:endParaRPr>
-          </a:p>
-        </p:txBody>
-      </p:sp>
-    </p:spTree>
-    <p:extLst>
-      <p:ext uri="{BB962C8B-B14F-4D97-AF65-F5344CB8AC3E}">
-        <p14:creationId xmlns:p14="http://schemas.microsoft.com/office/powerpoint/2010/main" val="1673173374"/>
-      </p:ext>
-    </p:extLst>
-  </p:cSld>
-  <p:clrMapOvr>
-    <a:masterClrMapping/>
-  </p:clrMapOvr>
-</p:sld>
-</file>
-
-<file path=ppt/slides/slide13.xml><?xml version="1.0" encoding="utf-8"?>
-<p:sld xmlns:a="http://schemas.openxmlformats.org/drawingml/2006/main" xmlns:r="http://schemas.openxmlformats.org/officeDocument/2006/relationships" xmlns:p="http://schemas.openxmlformats.org/presentationml/2006/main">
-  <p:cSld>
-    <p:spTree>
-      <p:nvGrpSpPr>
-        <p:cNvPr id="1" name="">
-          <a:extLst>
-            <a:ext uri="{FF2B5EF4-FFF2-40B4-BE49-F238E27FC236}">
-              <a16:creationId xmlns:a16="http://schemas.microsoft.com/office/drawing/2014/main" id="{2E53E0CD-462C-3CCF-C8AA-F4F192DCE71C}"/>
-            </a:ext>
-          </a:extLst>
-        </p:cNvPr>
-        <p:cNvGrpSpPr/>
-        <p:nvPr/>
-      </p:nvGrpSpPr>
-      <p:grpSpPr>
-        <a:xfrm>
-          <a:off x="0" y="0"/>
-          <a:ext cx="0" cy="0"/>
-          <a:chOff x="0" y="0"/>
-          <a:chExt cx="0" cy="0"/>
-        </a:xfrm>
-      </p:grpSpPr>
-      <p:sp>
-        <p:nvSpPr>
-          <p:cNvPr id="9" name="Rectangle 8">
-            <a:extLst>
-              <a:ext uri="{FF2B5EF4-FFF2-40B4-BE49-F238E27FC236}">
-                <a16:creationId xmlns:a16="http://schemas.microsoft.com/office/drawing/2014/main" id="{49C49142-9917-E81C-3271-2ACB52E8D236}"/>
-              </a:ext>
-            </a:extLst>
-          </p:cNvPr>
-          <p:cNvSpPr/>
-          <p:nvPr/>
-        </p:nvSpPr>
-        <p:spPr>
-          <a:xfrm>
-            <a:off x="0" y="0"/>
-            <a:ext cx="12192000" cy="688157"/>
-          </a:xfrm>
-          <a:prstGeom prst="rect">
-            <a:avLst/>
-          </a:prstGeom>
-          <a:solidFill>
-            <a:srgbClr val="222222"/>
-          </a:solidFill>
-          <a:ln>
-            <a:noFill/>
-          </a:ln>
-        </p:spPr>
-        <p:style>
-          <a:lnRef idx="2">
-            <a:schemeClr val="accent1">
-              <a:shade val="15000"/>
-            </a:schemeClr>
-          </a:lnRef>
-          <a:fillRef idx="1">
-            <a:schemeClr val="accent1"/>
-          </a:fillRef>
-          <a:effectRef idx="0">
-            <a:schemeClr val="accent1"/>
-          </a:effectRef>
-          <a:fontRef idx="minor">
-            <a:schemeClr val="lt1"/>
-          </a:fontRef>
-        </p:style>
-        <p:txBody>
-          <a:bodyPr rtlCol="0" anchor="ctr"/>
-          <a:lstStyle/>
-          <a:p>
-            <a:pPr algn="ctr"/>
-            <a:endParaRPr lang="en-US"/>
-          </a:p>
-        </p:txBody>
-      </p:sp>
-      <p:sp>
-        <p:nvSpPr>
-          <p:cNvPr id="12" name="Rectangle: Rounded Corners 11">
-            <a:extLst>
-              <a:ext uri="{FF2B5EF4-FFF2-40B4-BE49-F238E27FC236}">
-                <a16:creationId xmlns:a16="http://schemas.microsoft.com/office/drawing/2014/main" id="{99BDA964-E049-F286-9554-DFC1C9905A4C}"/>
-              </a:ext>
-            </a:extLst>
-          </p:cNvPr>
-          <p:cNvSpPr/>
-          <p:nvPr/>
-        </p:nvSpPr>
-        <p:spPr>
-          <a:xfrm>
-            <a:off x="145606" y="142562"/>
-            <a:ext cx="403034" cy="403034"/>
-          </a:xfrm>
-          <a:prstGeom prst="roundRect">
-            <a:avLst/>
-          </a:prstGeom>
-          <a:solidFill>
-            <a:schemeClr val="bg1"/>
-          </a:solidFill>
-          <a:ln>
-            <a:noFill/>
-          </a:ln>
-        </p:spPr>
-        <p:style>
-          <a:lnRef idx="2">
-            <a:schemeClr val="accent1">
-              <a:shade val="15000"/>
-            </a:schemeClr>
-          </a:lnRef>
-          <a:fillRef idx="1">
-            <a:schemeClr val="accent1"/>
-          </a:fillRef>
-          <a:effectRef idx="0">
-            <a:schemeClr val="accent1"/>
-          </a:effectRef>
-          <a:fontRef idx="minor">
-            <a:schemeClr val="lt1"/>
-          </a:fontRef>
-        </p:style>
-        <p:txBody>
-          <a:bodyPr rtlCol="0" anchor="ctr"/>
-          <a:lstStyle/>
-          <a:p>
-            <a:pPr algn="ctr"/>
-            <a:r>
-              <a:rPr lang="ru-RU" dirty="0"/>
-              <a:t>ё</a:t>
-            </a:r>
-            <a:endParaRPr lang="en-US" dirty="0"/>
-          </a:p>
-        </p:txBody>
-      </p:sp>
-      <p:sp>
-        <p:nvSpPr>
-          <p:cNvPr id="2" name="Slide Number Placeholder 1">
-            <a:extLst>
-              <a:ext uri="{FF2B5EF4-FFF2-40B4-BE49-F238E27FC236}">
-                <a16:creationId xmlns:a16="http://schemas.microsoft.com/office/drawing/2014/main" id="{204B3FCC-87D4-BBB2-60A3-E6A82CCF760F}"/>
-              </a:ext>
-            </a:extLst>
-          </p:cNvPr>
-          <p:cNvSpPr>
-            <a:spLocks noGrp="1"/>
-          </p:cNvSpPr>
-          <p:nvPr>
-            <p:ph type="sldNum" sz="quarter" idx="12"/>
-          </p:nvPr>
-        </p:nvSpPr>
-        <p:spPr>
-          <a:xfrm>
-            <a:off x="145606" y="142562"/>
-            <a:ext cx="403034" cy="403034"/>
-          </a:xfrm>
-        </p:spPr>
-        <p:txBody>
-          <a:bodyPr/>
-          <a:lstStyle/>
-          <a:p>
-            <a:pPr algn="ctr"/>
-            <a:fld id="{E484B7D4-87AC-4334-8015-F9E0E28AB063}" type="slidenum">
-              <a:rPr lang="en-US" sz="1600" smtClean="0">
-                <a:solidFill>
-                  <a:srgbClr val="222222"/>
-                </a:solidFill>
-              </a:rPr>
-              <a:pPr algn="ctr"/>
-              <a:t>13</a:t>
-            </a:fld>
-            <a:endParaRPr lang="en-US" sz="1600" dirty="0">
-              <a:solidFill>
-                <a:srgbClr val="222222"/>
-              </a:solidFill>
-            </a:endParaRPr>
-          </a:p>
-        </p:txBody>
-      </p:sp>
-    </p:spTree>
-    <p:extLst>
-      <p:ext uri="{BB962C8B-B14F-4D97-AF65-F5344CB8AC3E}">
-        <p14:creationId xmlns:p14="http://schemas.microsoft.com/office/powerpoint/2010/main" val="3365393624"/>
-      </p:ext>
-    </p:extLst>
-  </p:cSld>
-  <p:clrMapOvr>
-    <a:masterClrMapping/>
-  </p:clrMapOvr>
-</p:sld>
-</file>
-
-<file path=ppt/slides/slide14.xml><?xml version="1.0" encoding="utf-8"?>
-<p:sld xmlns:a="http://schemas.openxmlformats.org/drawingml/2006/main" xmlns:r="http://schemas.openxmlformats.org/officeDocument/2006/relationships" xmlns:p="http://schemas.openxmlformats.org/presentationml/2006/main">
-  <p:cSld>
-    <p:spTree>
-      <p:nvGrpSpPr>
-        <p:cNvPr id="1" name="">
-          <a:extLst>
-            <a:ext uri="{FF2B5EF4-FFF2-40B4-BE49-F238E27FC236}">
-              <a16:creationId xmlns:a16="http://schemas.microsoft.com/office/drawing/2014/main" id="{029C50A6-356E-6634-5B19-DD29FDB85E88}"/>
-            </a:ext>
-          </a:extLst>
-        </p:cNvPr>
-        <p:cNvGrpSpPr/>
-        <p:nvPr/>
-      </p:nvGrpSpPr>
-      <p:grpSpPr>
-        <a:xfrm>
-          <a:off x="0" y="0"/>
-          <a:ext cx="0" cy="0"/>
-          <a:chOff x="0" y="0"/>
-          <a:chExt cx="0" cy="0"/>
-        </a:xfrm>
-      </p:grpSpPr>
-      <p:sp>
-        <p:nvSpPr>
-          <p:cNvPr id="9" name="Rectangle 8">
-            <a:extLst>
-              <a:ext uri="{FF2B5EF4-FFF2-40B4-BE49-F238E27FC236}">
-                <a16:creationId xmlns:a16="http://schemas.microsoft.com/office/drawing/2014/main" id="{CEEF65E5-F77A-33C2-CBB4-DCC4CD24B1A0}"/>
-              </a:ext>
-            </a:extLst>
-          </p:cNvPr>
-          <p:cNvSpPr/>
-          <p:nvPr/>
-        </p:nvSpPr>
-        <p:spPr>
-          <a:xfrm>
-            <a:off x="0" y="0"/>
-            <a:ext cx="12192000" cy="688157"/>
-          </a:xfrm>
-          <a:prstGeom prst="rect">
-            <a:avLst/>
-          </a:prstGeom>
-          <a:solidFill>
-            <a:srgbClr val="222222"/>
-          </a:solidFill>
-          <a:ln>
-            <a:noFill/>
-          </a:ln>
-        </p:spPr>
-        <p:style>
-          <a:lnRef idx="2">
-            <a:schemeClr val="accent1">
-              <a:shade val="15000"/>
-            </a:schemeClr>
-          </a:lnRef>
-          <a:fillRef idx="1">
-            <a:schemeClr val="accent1"/>
-          </a:fillRef>
-          <a:effectRef idx="0">
-            <a:schemeClr val="accent1"/>
-          </a:effectRef>
-          <a:fontRef idx="minor">
-            <a:schemeClr val="lt1"/>
-          </a:fontRef>
-        </p:style>
-        <p:txBody>
-          <a:bodyPr rtlCol="0" anchor="ctr"/>
-          <a:lstStyle/>
-          <a:p>
-            <a:pPr algn="ctr"/>
-            <a:endParaRPr lang="en-US"/>
-          </a:p>
-        </p:txBody>
-      </p:sp>
-      <p:sp>
-        <p:nvSpPr>
-          <p:cNvPr id="12" name="Rectangle: Rounded Corners 11">
-            <a:extLst>
-              <a:ext uri="{FF2B5EF4-FFF2-40B4-BE49-F238E27FC236}">
-                <a16:creationId xmlns:a16="http://schemas.microsoft.com/office/drawing/2014/main" id="{F1E85E81-D835-1244-4CD2-DC547CC563D6}"/>
-              </a:ext>
-            </a:extLst>
-          </p:cNvPr>
-          <p:cNvSpPr/>
-          <p:nvPr/>
-        </p:nvSpPr>
-        <p:spPr>
-          <a:xfrm>
-            <a:off x="145606" y="142562"/>
-            <a:ext cx="403034" cy="403034"/>
-          </a:xfrm>
-          <a:prstGeom prst="roundRect">
-            <a:avLst/>
-          </a:prstGeom>
-          <a:solidFill>
-            <a:schemeClr val="bg1"/>
-          </a:solidFill>
-          <a:ln>
-            <a:noFill/>
-          </a:ln>
-        </p:spPr>
-        <p:style>
-          <a:lnRef idx="2">
-            <a:schemeClr val="accent1">
-              <a:shade val="15000"/>
-            </a:schemeClr>
-          </a:lnRef>
-          <a:fillRef idx="1">
-            <a:schemeClr val="accent1"/>
-          </a:fillRef>
-          <a:effectRef idx="0">
-            <a:schemeClr val="accent1"/>
-          </a:effectRef>
-          <a:fontRef idx="minor">
-            <a:schemeClr val="lt1"/>
-          </a:fontRef>
-        </p:style>
-        <p:txBody>
-          <a:bodyPr rtlCol="0" anchor="ctr"/>
-          <a:lstStyle/>
-          <a:p>
-            <a:pPr algn="ctr"/>
-            <a:r>
-              <a:rPr lang="ru-RU" dirty="0"/>
-              <a:t>ё</a:t>
-            </a:r>
-            <a:endParaRPr lang="en-US" dirty="0"/>
-          </a:p>
-        </p:txBody>
-      </p:sp>
-      <p:sp>
-        <p:nvSpPr>
-          <p:cNvPr id="2" name="Slide Number Placeholder 1">
-            <a:extLst>
-              <a:ext uri="{FF2B5EF4-FFF2-40B4-BE49-F238E27FC236}">
-                <a16:creationId xmlns:a16="http://schemas.microsoft.com/office/drawing/2014/main" id="{EF98F5EE-AE6F-8BA2-3F8F-E984D52F4B95}"/>
-              </a:ext>
-            </a:extLst>
-          </p:cNvPr>
-          <p:cNvSpPr>
-            <a:spLocks noGrp="1"/>
-          </p:cNvSpPr>
-          <p:nvPr>
-            <p:ph type="sldNum" sz="quarter" idx="12"/>
-          </p:nvPr>
-        </p:nvSpPr>
-        <p:spPr>
-          <a:xfrm>
-            <a:off x="145606" y="142562"/>
-            <a:ext cx="403034" cy="403034"/>
-          </a:xfrm>
-        </p:spPr>
-        <p:txBody>
-          <a:bodyPr/>
-          <a:lstStyle/>
-          <a:p>
-            <a:pPr algn="ctr"/>
-            <a:fld id="{E484B7D4-87AC-4334-8015-F9E0E28AB063}" type="slidenum">
-              <a:rPr lang="en-US" sz="1600" smtClean="0">
-                <a:solidFill>
-                  <a:srgbClr val="222222"/>
-                </a:solidFill>
-              </a:rPr>
-              <a:pPr algn="ctr"/>
-              <a:t>14</a:t>
-            </a:fld>
-            <a:endParaRPr lang="en-US" sz="1600" dirty="0">
-              <a:solidFill>
-                <a:srgbClr val="222222"/>
-              </a:solidFill>
-            </a:endParaRPr>
-          </a:p>
-        </p:txBody>
-      </p:sp>
-    </p:spTree>
-    <p:extLst>
-      <p:ext uri="{BB962C8B-B14F-4D97-AF65-F5344CB8AC3E}">
-        <p14:creationId xmlns:p14="http://schemas.microsoft.com/office/powerpoint/2010/main" val="3230809163"/>
       </p:ext>
     </p:extLst>
   </p:cSld>
@@ -5556,6 +5169,84 @@
                 <a:srgbClr val="222222"/>
               </a:solidFill>
             </a:endParaRPr>
+          </a:p>
+        </p:txBody>
+      </p:sp>
+      <p:sp>
+        <p:nvSpPr>
+          <p:cNvPr id="3" name="TextBox 2">
+            <a:extLst>
+              <a:ext uri="{FF2B5EF4-FFF2-40B4-BE49-F238E27FC236}">
+                <a16:creationId xmlns:a16="http://schemas.microsoft.com/office/drawing/2014/main" id="{753A7FDE-BAE5-81CB-D847-5D812A01B432}"/>
+              </a:ext>
+            </a:extLst>
+          </p:cNvPr>
+          <p:cNvSpPr txBox="1"/>
+          <p:nvPr/>
+        </p:nvSpPr>
+        <p:spPr>
+          <a:xfrm>
+            <a:off x="548640" y="1881317"/>
+            <a:ext cx="11329576" cy="1754326"/>
+          </a:xfrm>
+          <a:prstGeom prst="rect">
+            <a:avLst/>
+          </a:prstGeom>
+          <a:noFill/>
+        </p:spPr>
+        <p:txBody>
+          <a:bodyPr wrap="none" rtlCol="0">
+            <a:spAutoFit/>
+          </a:bodyPr>
+          <a:lstStyle/>
+          <a:p>
+            <a:r>
+              <a:rPr lang="ru-RU" dirty="0"/>
+              <a:t>Визуал: Иллюстрация «информационного взрыва» — гора PDF-иконок или график роста количества публикаций.</a:t>
+            </a:r>
+          </a:p>
+          <a:p>
+            <a:endParaRPr lang="ru-RU" dirty="0"/>
+          </a:p>
+          <a:p>
+            <a:r>
+              <a:rPr lang="ru-RU" dirty="0"/>
+              <a:t>Текст:</a:t>
+            </a:r>
+          </a:p>
+          <a:p>
+            <a:pPr marL="285750" indent="-285750">
+              <a:buFont typeface="Arial" panose="020B0604020202020204" pitchFamily="34" charset="0"/>
+              <a:buChar char="•"/>
+            </a:pPr>
+            <a:r>
+              <a:rPr lang="ru-RU" b="1" dirty="0"/>
+              <a:t>17 081</a:t>
+            </a:r>
+            <a:r>
+              <a:rPr lang="ru-RU" dirty="0"/>
+              <a:t> научных статей в категории cs.CL только за 2025 год.</a:t>
+            </a:r>
+          </a:p>
+          <a:p>
+            <a:pPr marL="285750" indent="-285750">
+              <a:buFont typeface="Arial" panose="020B0604020202020204" pitchFamily="34" charset="0"/>
+              <a:buChar char="•"/>
+            </a:pPr>
+            <a:r>
+              <a:rPr lang="ru-RU" dirty="0"/>
+              <a:t>Проблема: Невозможность ручного мониторинга такого объема данных.</a:t>
+            </a:r>
+          </a:p>
+          <a:p>
+            <a:pPr marL="285750" indent="-285750">
+              <a:buFont typeface="Arial" panose="020B0604020202020204" pitchFamily="34" charset="0"/>
+              <a:buChar char="•"/>
+            </a:pPr>
+            <a:r>
+              <a:rPr lang="ru-RU" dirty="0"/>
+              <a:t>Решение: Мгновенный поиск ответов по свежему научному корпусу.</a:t>
+            </a:r>
           </a:p>
         </p:txBody>
       </p:sp>
@@ -5751,6 +5442,97 @@
           </a:p>
         </p:txBody>
       </p:sp>
+      <p:sp>
+        <p:nvSpPr>
+          <p:cNvPr id="3" name="TextBox 2">
+            <a:extLst>
+              <a:ext uri="{FF2B5EF4-FFF2-40B4-BE49-F238E27FC236}">
+                <a16:creationId xmlns:a16="http://schemas.microsoft.com/office/drawing/2014/main" id="{3C851274-CAE1-9EC1-6A04-FA4D02A05E60}"/>
+              </a:ext>
+            </a:extLst>
+          </p:cNvPr>
+          <p:cNvSpPr txBox="1"/>
+          <p:nvPr/>
+        </p:nvSpPr>
+        <p:spPr>
+          <a:xfrm>
+            <a:off x="3801013" y="2551837"/>
+            <a:ext cx="4589974" cy="1754326"/>
+          </a:xfrm>
+          <a:prstGeom prst="rect">
+            <a:avLst/>
+          </a:prstGeom>
+          <a:noFill/>
+        </p:spPr>
+        <p:txBody>
+          <a:bodyPr wrap="none" rtlCol="0">
+            <a:spAutoFit/>
+          </a:bodyPr>
+          <a:lstStyle/>
+          <a:p>
+            <a:r>
+              <a:rPr lang="ru-RU" dirty="0"/>
+              <a:t>Визуал:</a:t>
+            </a:r>
+          </a:p>
+          <a:p>
+            <a:r>
+              <a:rPr lang="ru-RU" dirty="0"/>
+              <a:t>Логотипы </a:t>
+            </a:r>
+            <a:r>
+              <a:rPr lang="ru-RU" b="1" dirty="0"/>
+              <a:t>arXiv.org</a:t>
+            </a:r>
+            <a:r>
+              <a:rPr lang="ru-RU" dirty="0"/>
+              <a:t> и иконка базы данных.</a:t>
+            </a:r>
+          </a:p>
+          <a:p>
+            <a:r>
+              <a:rPr lang="ru-RU" dirty="0"/>
+              <a:t>Текст:</a:t>
+            </a:r>
+          </a:p>
+          <a:p>
+            <a:r>
+              <a:rPr lang="ru-RU" dirty="0"/>
+              <a:t>Источник: Официальный </a:t>
+            </a:r>
+            <a:r>
+              <a:rPr lang="en-US" dirty="0"/>
+              <a:t>API </a:t>
+            </a:r>
+            <a:r>
+              <a:rPr lang="en-US" dirty="0" err="1"/>
+              <a:t>ArXiv</a:t>
+            </a:r>
+            <a:r>
+              <a:rPr lang="en-US" dirty="0"/>
+              <a:t>.</a:t>
+            </a:r>
+            <a:endParaRPr lang="ru-RU" dirty="0"/>
+          </a:p>
+          <a:p>
+            <a:r>
+              <a:rPr lang="en-US" dirty="0" err="1"/>
+              <a:t>Категория</a:t>
+            </a:r>
+            <a:r>
+              <a:rPr lang="en-US" dirty="0"/>
+              <a:t>: Computation and Language (cs.CL).</a:t>
+            </a:r>
+            <a:endParaRPr lang="ru-RU" dirty="0"/>
+          </a:p>
+          <a:p>
+            <a:r>
+              <a:rPr lang="ru-RU" dirty="0"/>
+              <a:t>Период: Весь 2025 год (январь–декабрь).</a:t>
+            </a:r>
+          </a:p>
+        </p:txBody>
+      </p:sp>
     </p:spTree>
     <p:extLst>
       <p:ext uri="{BB962C8B-B14F-4D97-AF65-F5344CB8AC3E}">
@@ -5943,6 +5725,98 @@
           </a:p>
         </p:txBody>
       </p:sp>
+      <p:sp>
+        <p:nvSpPr>
+          <p:cNvPr id="3" name="TextBox 2">
+            <a:extLst>
+              <a:ext uri="{FF2B5EF4-FFF2-40B4-BE49-F238E27FC236}">
+                <a16:creationId xmlns:a16="http://schemas.microsoft.com/office/drawing/2014/main" id="{7B751BF9-D271-38E0-C8B0-C6CB16AAFA66}"/>
+              </a:ext>
+            </a:extLst>
+          </p:cNvPr>
+          <p:cNvSpPr txBox="1"/>
+          <p:nvPr/>
+        </p:nvSpPr>
+        <p:spPr>
+          <a:xfrm>
+            <a:off x="2688650" y="2702666"/>
+            <a:ext cx="7371954" cy="2031325"/>
+          </a:xfrm>
+          <a:prstGeom prst="rect">
+            <a:avLst/>
+          </a:prstGeom>
+          <a:noFill/>
+        </p:spPr>
+        <p:txBody>
+          <a:bodyPr wrap="none" rtlCol="0">
+            <a:spAutoFit/>
+          </a:bodyPr>
+          <a:lstStyle/>
+          <a:p>
+            <a:r>
+              <a:rPr lang="ru-RU" dirty="0"/>
+              <a:t>Визуал:</a:t>
+            </a:r>
+          </a:p>
+          <a:p>
+            <a:r>
+              <a:rPr lang="ru-RU" dirty="0"/>
+              <a:t>Схема-конвейер: </a:t>
+            </a:r>
+            <a:r>
+              <a:rPr lang="en-US" dirty="0"/>
+              <a:t>HTML -&gt; Cleaner -&gt; Markdown.</a:t>
+            </a:r>
+            <a:r>
+              <a:rPr lang="ru-RU" dirty="0"/>
+              <a:t>Текст:</a:t>
+            </a:r>
+          </a:p>
+          <a:p>
+            <a:r>
+              <a:rPr lang="ru-RU" dirty="0"/>
+              <a:t>Источник: </a:t>
+            </a:r>
+          </a:p>
+          <a:p>
+            <a:endParaRPr lang="ru-RU" dirty="0"/>
+          </a:p>
+          <a:p>
+            <a:r>
+              <a:rPr lang="ru-RU" dirty="0"/>
+              <a:t>Очистка от «шума»: удаление списков литературы и благодарностей.</a:t>
+            </a:r>
+          </a:p>
+          <a:p>
+            <a:r>
+              <a:rPr lang="ru-RU" dirty="0"/>
+              <a:t>Сохранение математики: формулы остаются в формате </a:t>
+            </a:r>
+            <a:r>
+              <a:rPr lang="ru-RU" dirty="0" err="1"/>
+              <a:t>LaTeX</a:t>
+            </a:r>
+            <a:r>
+              <a:rPr lang="ru-RU" dirty="0"/>
+              <a:t>.</a:t>
+            </a:r>
+          </a:p>
+          <a:p>
+            <a:r>
+              <a:rPr lang="ru-RU" dirty="0"/>
+              <a:t>Конвертация: HTML в чистый </a:t>
+            </a:r>
+            <a:r>
+              <a:rPr lang="ru-RU" dirty="0" err="1"/>
+              <a:t>Markdown</a:t>
+            </a:r>
+            <a:r>
+              <a:rPr lang="ru-RU" dirty="0"/>
+              <a:t> для лучшей интерпретации LLM.</a:t>
+            </a:r>
+          </a:p>
+        </p:txBody>
+      </p:sp>
     </p:spTree>
     <p:extLst>
       <p:ext uri="{BB962C8B-B14F-4D97-AF65-F5344CB8AC3E}">
@@ -6135,6 +6009,118 @@
           </a:p>
         </p:txBody>
       </p:sp>
+      <p:sp>
+        <p:nvSpPr>
+          <p:cNvPr id="3" name="TextBox 2">
+            <a:extLst>
+              <a:ext uri="{FF2B5EF4-FFF2-40B4-BE49-F238E27FC236}">
+                <a16:creationId xmlns:a16="http://schemas.microsoft.com/office/drawing/2014/main" id="{1E0AE7E3-70E7-270C-54DD-8A839B525039}"/>
+              </a:ext>
+            </a:extLst>
+          </p:cNvPr>
+          <p:cNvSpPr txBox="1"/>
+          <p:nvPr/>
+        </p:nvSpPr>
+        <p:spPr>
+          <a:xfrm>
+            <a:off x="875543" y="2413337"/>
+            <a:ext cx="11109067" cy="2031325"/>
+          </a:xfrm>
+          <a:prstGeom prst="rect">
+            <a:avLst/>
+          </a:prstGeom>
+          <a:noFill/>
+        </p:spPr>
+        <p:txBody>
+          <a:bodyPr wrap="none" rtlCol="0">
+            <a:spAutoFit/>
+          </a:bodyPr>
+          <a:lstStyle/>
+          <a:p>
+            <a:r>
+              <a:rPr lang="ru-RU" dirty="0"/>
+              <a:t>Визуал:</a:t>
+            </a:r>
+          </a:p>
+          <a:p>
+            <a:r>
+              <a:rPr lang="ru-RU" dirty="0"/>
+              <a:t>Иллюстрация документа, разрезаемого на смысловые блоки.</a:t>
+            </a:r>
+          </a:p>
+          <a:p>
+            <a:endParaRPr lang="ru-RU" dirty="0"/>
+          </a:p>
+          <a:p>
+            <a:r>
+              <a:rPr lang="ru-RU" dirty="0"/>
+              <a:t>Текст:</a:t>
+            </a:r>
+          </a:p>
+          <a:p>
+            <a:r>
+              <a:rPr lang="ru-RU" b="1" dirty="0"/>
+              <a:t>Двухэтапный подход:</a:t>
+            </a:r>
+            <a:r>
+              <a:rPr lang="ru-RU" dirty="0"/>
+              <a:t> Сначала логическая нарезка по заголовкам </a:t>
+            </a:r>
+            <a:r>
+              <a:rPr lang="ru-RU" dirty="0" err="1"/>
+              <a:t>Markdown</a:t>
+            </a:r>
+            <a:r>
+              <a:rPr lang="ru-RU" dirty="0"/>
+              <a:t>, затем рекурсивная по символам.</a:t>
+            </a:r>
+          </a:p>
+          <a:p>
+            <a:r>
+              <a:rPr lang="ru-RU" dirty="0"/>
+              <a:t>Размер </a:t>
+            </a:r>
+            <a:r>
+              <a:rPr lang="ru-RU" dirty="0" err="1"/>
+              <a:t>чанка</a:t>
+            </a:r>
+            <a:r>
+              <a:rPr lang="ru-RU" dirty="0"/>
+              <a:t>: </a:t>
+            </a:r>
+            <a:r>
+              <a:rPr lang="ru-RU" b="1" dirty="0"/>
+              <a:t>512 токенов</a:t>
+            </a:r>
+            <a:r>
+              <a:rPr lang="ru-RU" dirty="0"/>
+              <a:t> с перекрытием в 64.</a:t>
+            </a:r>
+          </a:p>
+          <a:p>
+            <a:r>
+              <a:rPr lang="ru-RU" dirty="0"/>
+              <a:t>Результат: </a:t>
+            </a:r>
+            <a:r>
+              <a:rPr lang="ru-RU" b="1" dirty="0"/>
+              <a:t>767 801</a:t>
+            </a:r>
+            <a:r>
+              <a:rPr lang="ru-RU" dirty="0"/>
+              <a:t> </a:t>
+            </a:r>
+            <a:r>
+              <a:rPr lang="ru-RU" dirty="0" err="1"/>
+              <a:t>чанков</a:t>
+            </a:r>
+            <a:r>
+              <a:rPr lang="ru-RU" dirty="0"/>
+              <a:t>.</a:t>
+            </a:r>
+          </a:p>
+        </p:txBody>
+      </p:sp>
     </p:spTree>
     <p:extLst>
       <p:ext uri="{BB962C8B-B14F-4D97-AF65-F5344CB8AC3E}">
@@ -6327,6 +6313,103 @@
           </a:p>
         </p:txBody>
       </p:sp>
+      <p:sp>
+        <p:nvSpPr>
+          <p:cNvPr id="3" name="TextBox 2">
+            <a:extLst>
+              <a:ext uri="{FF2B5EF4-FFF2-40B4-BE49-F238E27FC236}">
+                <a16:creationId xmlns:a16="http://schemas.microsoft.com/office/drawing/2014/main" id="{C626264C-B0D7-0D43-A1D8-A01EA51618AE}"/>
+              </a:ext>
+            </a:extLst>
+          </p:cNvPr>
+          <p:cNvSpPr txBox="1"/>
+          <p:nvPr/>
+        </p:nvSpPr>
+        <p:spPr>
+          <a:xfrm>
+            <a:off x="875543" y="2413337"/>
+            <a:ext cx="5438476" cy="2031325"/>
+          </a:xfrm>
+          <a:prstGeom prst="rect">
+            <a:avLst/>
+          </a:prstGeom>
+          <a:noFill/>
+        </p:spPr>
+        <p:txBody>
+          <a:bodyPr wrap="none" rtlCol="0">
+            <a:spAutoFit/>
+          </a:bodyPr>
+          <a:lstStyle/>
+          <a:p>
+            <a:r>
+              <a:rPr lang="ru-RU" dirty="0"/>
+              <a:t>Визуал:</a:t>
+            </a:r>
+          </a:p>
+          <a:p>
+            <a:r>
+              <a:rPr lang="ru-RU" dirty="0"/>
+              <a:t>Схема «Текст -&gt; Нейросеть -&gt; Вектор [0.12, -0.5, ...]».</a:t>
+            </a:r>
+          </a:p>
+          <a:p>
+            <a:endParaRPr lang="ru-RU" dirty="0"/>
+          </a:p>
+          <a:p>
+            <a:r>
+              <a:rPr lang="ru-RU" dirty="0"/>
+              <a:t>Текст:</a:t>
+            </a:r>
+          </a:p>
+          <a:p>
+            <a:r>
+              <a:rPr lang="ru-RU" dirty="0"/>
+              <a:t>Модель </a:t>
+            </a:r>
+            <a:r>
+              <a:rPr lang="ru-RU" dirty="0" err="1"/>
+              <a:t>эмбеддингов</a:t>
+            </a:r>
+            <a:r>
+              <a:rPr lang="ru-RU" dirty="0"/>
+              <a:t>: </a:t>
+            </a:r>
+            <a:r>
+              <a:rPr lang="en-US" dirty="0"/>
+              <a:t>Qwen/Qwen3-Embedding-0.6B.</a:t>
+            </a:r>
+            <a:endParaRPr lang="ru-RU" dirty="0"/>
+          </a:p>
+          <a:p>
+            <a:r>
+              <a:rPr lang="ru-RU" dirty="0"/>
+              <a:t>Метод: </a:t>
+            </a:r>
+            <a:r>
+              <a:rPr lang="en-US" dirty="0"/>
+              <a:t>Dense Vector Search (</a:t>
+            </a:r>
+            <a:r>
+              <a:rPr lang="ru-RU" dirty="0"/>
+              <a:t>Косинусное сходство).</a:t>
+            </a:r>
+          </a:p>
+          <a:p>
+            <a:r>
+              <a:rPr lang="ru-RU" dirty="0"/>
+              <a:t>Оптимизация: Обработка </a:t>
+            </a:r>
+            <a:r>
+              <a:rPr lang="ru-RU" dirty="0" err="1"/>
+              <a:t>батчами</a:t>
+            </a:r>
+            <a:r>
+              <a:rPr lang="ru-RU" dirty="0"/>
+              <a:t> на GPU.</a:t>
+            </a:r>
+          </a:p>
+        </p:txBody>
+      </p:sp>
     </p:spTree>
     <p:extLst>
       <p:ext uri="{BB962C8B-B14F-4D97-AF65-F5344CB8AC3E}">
@@ -6519,6 +6602,142 @@
           </a:p>
         </p:txBody>
       </p:sp>
+      <p:sp>
+        <p:nvSpPr>
+          <p:cNvPr id="3" name="TextBox 2">
+            <a:extLst>
+              <a:ext uri="{FF2B5EF4-FFF2-40B4-BE49-F238E27FC236}">
+                <a16:creationId xmlns:a16="http://schemas.microsoft.com/office/drawing/2014/main" id="{E0E32C37-B21D-966B-43B7-A1B9948A1A1A}"/>
+              </a:ext>
+            </a:extLst>
+          </p:cNvPr>
+          <p:cNvSpPr txBox="1"/>
+          <p:nvPr/>
+        </p:nvSpPr>
+        <p:spPr>
+          <a:xfrm>
+            <a:off x="2999960" y="2413337"/>
+            <a:ext cx="6192080" cy="2031325"/>
+          </a:xfrm>
+          <a:prstGeom prst="rect">
+            <a:avLst/>
+          </a:prstGeom>
+          <a:noFill/>
+        </p:spPr>
+        <p:txBody>
+          <a:bodyPr wrap="none" rtlCol="0">
+            <a:spAutoFit/>
+          </a:bodyPr>
+          <a:lstStyle/>
+          <a:p>
+            <a:r>
+              <a:rPr lang="ru-RU" dirty="0"/>
+              <a:t>Визуал:</a:t>
+            </a:r>
+          </a:p>
+          <a:p>
+            <a:r>
+              <a:rPr lang="ru-RU" dirty="0"/>
+              <a:t>Логотип </a:t>
+            </a:r>
+            <a:r>
+              <a:rPr lang="ru-RU" b="1" dirty="0" err="1"/>
+              <a:t>Qdrant</a:t>
+            </a:r>
+            <a:r>
+              <a:rPr lang="ru-RU" dirty="0"/>
+              <a:t> и иконка облачного хранилища </a:t>
+            </a:r>
+            <a:r>
+              <a:rPr lang="ru-RU" b="1" dirty="0"/>
+              <a:t>S3</a:t>
+            </a:r>
+            <a:r>
+              <a:rPr lang="ru-RU" dirty="0"/>
+              <a:t>.</a:t>
+            </a:r>
+          </a:p>
+          <a:p>
+            <a:endParaRPr lang="ru-RU" dirty="0"/>
+          </a:p>
+          <a:p>
+            <a:r>
+              <a:rPr lang="ru-RU" dirty="0"/>
+              <a:t>Текст:</a:t>
+            </a:r>
+          </a:p>
+          <a:p>
+            <a:r>
+              <a:rPr lang="ru-RU" dirty="0"/>
+              <a:t>Векторная БД: </a:t>
+            </a:r>
+            <a:r>
+              <a:rPr lang="ru-RU" b="1" dirty="0" err="1"/>
+              <a:t>Qdrant</a:t>
+            </a:r>
+            <a:r>
+              <a:rPr lang="ru-RU" dirty="0"/>
+              <a:t> в </a:t>
+            </a:r>
+            <a:r>
+              <a:rPr lang="ru-RU" dirty="0" err="1"/>
+              <a:t>Docker</a:t>
+            </a:r>
+            <a:r>
+              <a:rPr lang="ru-RU" dirty="0"/>
+              <a:t>-контейнере.</a:t>
+            </a:r>
+          </a:p>
+          <a:p>
+            <a:r>
+              <a:rPr lang="ru-RU" dirty="0" err="1"/>
+              <a:t>DataOps</a:t>
+            </a:r>
+            <a:r>
+              <a:rPr lang="ru-RU" dirty="0"/>
+              <a:t>: </a:t>
+            </a:r>
+            <a:r>
+              <a:rPr lang="ru-RU" dirty="0" err="1"/>
+              <a:t>Версионирование</a:t>
+            </a:r>
+            <a:r>
+              <a:rPr lang="ru-RU" dirty="0"/>
+              <a:t> данных через </a:t>
+            </a:r>
+            <a:r>
+              <a:rPr lang="ru-RU" b="1" dirty="0"/>
+              <a:t>DVC</a:t>
+            </a:r>
+            <a:r>
+              <a:rPr lang="ru-RU" dirty="0"/>
+              <a:t>.</a:t>
+            </a:r>
+          </a:p>
+          <a:p>
+            <a:r>
+              <a:rPr lang="ru-RU" dirty="0"/>
+              <a:t>Storage: Удаленное хранилище </a:t>
+            </a:r>
+            <a:r>
+              <a:rPr lang="ru-RU" b="1" dirty="0"/>
+              <a:t>S3</a:t>
+            </a:r>
+            <a:r>
+              <a:rPr lang="ru-RU" dirty="0"/>
+              <a:t> для </a:t>
+            </a:r>
+            <a:r>
+              <a:rPr lang="ru-RU" dirty="0" err="1"/>
+              <a:t>снапшотов</a:t>
+            </a:r>
+            <a:r>
+              <a:rPr lang="ru-RU" dirty="0"/>
+              <a:t> коллекции.</a:t>
+            </a:r>
+          </a:p>
+        </p:txBody>
+      </p:sp>
     </p:spTree>
     <p:extLst>
       <p:ext uri="{BB962C8B-B14F-4D97-AF65-F5344CB8AC3E}">
@@ -6711,6 +6930,118 @@
           </a:p>
         </p:txBody>
       </p:sp>
+      <p:sp>
+        <p:nvSpPr>
+          <p:cNvPr id="3" name="TextBox 2">
+            <a:extLst>
+              <a:ext uri="{FF2B5EF4-FFF2-40B4-BE49-F238E27FC236}">
+                <a16:creationId xmlns:a16="http://schemas.microsoft.com/office/drawing/2014/main" id="{07F7D86C-9444-1FFF-95E3-06DA18D02D9B}"/>
+              </a:ext>
+            </a:extLst>
+          </p:cNvPr>
+          <p:cNvSpPr txBox="1"/>
+          <p:nvPr/>
+        </p:nvSpPr>
+        <p:spPr>
+          <a:xfrm>
+            <a:off x="1171160" y="2460471"/>
+            <a:ext cx="10357515" cy="1754326"/>
+          </a:xfrm>
+          <a:prstGeom prst="rect">
+            <a:avLst/>
+          </a:prstGeom>
+          <a:noFill/>
+        </p:spPr>
+        <p:txBody>
+          <a:bodyPr wrap="none" rtlCol="0">
+            <a:spAutoFit/>
+          </a:bodyPr>
+          <a:lstStyle/>
+          <a:p>
+            <a:r>
+              <a:rPr lang="ru-RU" dirty="0"/>
+              <a:t>Визуал:</a:t>
+            </a:r>
+          </a:p>
+          <a:p>
+            <a:r>
+              <a:rPr lang="ru-RU" dirty="0"/>
+              <a:t>Блок-схема взаимодействия микросервисов: </a:t>
+            </a:r>
+            <a:r>
+              <a:rPr lang="en-US" dirty="0"/>
+              <a:t>Frontend (</a:t>
+            </a:r>
+            <a:r>
+              <a:rPr lang="en-US" dirty="0" err="1"/>
+              <a:t>Streamlit</a:t>
+            </a:r>
+            <a:r>
+              <a:rPr lang="en-US" dirty="0"/>
+              <a:t>) &lt;-&gt; Backend (</a:t>
+            </a:r>
+            <a:r>
+              <a:rPr lang="en-US" dirty="0" err="1"/>
+              <a:t>FastAPI</a:t>
+            </a:r>
+            <a:r>
+              <a:rPr lang="en-US" dirty="0"/>
+              <a:t>) &lt;-&gt; </a:t>
+            </a:r>
+            <a:r>
+              <a:rPr lang="en-US" dirty="0" err="1"/>
+              <a:t>Qdrant</a:t>
+            </a:r>
+            <a:r>
+              <a:rPr lang="en-US" dirty="0"/>
+              <a:t> / LLM.</a:t>
+            </a:r>
+            <a:endParaRPr lang="ru-RU" dirty="0"/>
+          </a:p>
+          <a:p>
+            <a:endParaRPr lang="ru-RU" dirty="0"/>
+          </a:p>
+          <a:p>
+            <a:r>
+              <a:rPr lang="ru-RU" dirty="0"/>
+              <a:t>Текст:</a:t>
+            </a:r>
+          </a:p>
+          <a:p>
+            <a:r>
+              <a:rPr lang="ru-RU" dirty="0" err="1"/>
+              <a:t>Оркестрация</a:t>
+            </a:r>
+            <a:r>
+              <a:rPr lang="ru-RU" dirty="0"/>
+              <a:t>: </a:t>
+            </a:r>
+            <a:r>
+              <a:rPr lang="en-US" b="1" dirty="0"/>
+              <a:t>Docker Compose</a:t>
+            </a:r>
+            <a:r>
+              <a:rPr lang="en-US" dirty="0"/>
+              <a:t>.</a:t>
+            </a:r>
+            <a:endParaRPr lang="ru-RU" dirty="0"/>
+          </a:p>
+          <a:p>
+            <a:r>
+              <a:rPr lang="ru-RU" dirty="0"/>
+              <a:t>Связь: Асинхронные запросы через </a:t>
+            </a:r>
+            <a:r>
+              <a:rPr lang="ru-RU" dirty="0" err="1"/>
+              <a:t>FastAPI</a:t>
+            </a:r>
+            <a:r>
+              <a:rPr lang="ru-RU" dirty="0"/>
+              <a:t>.</a:t>
+            </a:r>
+          </a:p>
+        </p:txBody>
+      </p:sp>
     </p:spTree>
     <p:extLst>
       <p:ext uri="{BB962C8B-B14F-4D97-AF65-F5344CB8AC3E}">
@@ -6903,6 +7234,97 @@
                 <a:srgbClr val="222222"/>
               </a:solidFill>
             </a:endParaRPr>
+          </a:p>
+        </p:txBody>
+      </p:sp>
+      <p:sp>
+        <p:nvSpPr>
+          <p:cNvPr id="3" name="TextBox 2">
+            <a:extLst>
+              <a:ext uri="{FF2B5EF4-FFF2-40B4-BE49-F238E27FC236}">
+                <a16:creationId xmlns:a16="http://schemas.microsoft.com/office/drawing/2014/main" id="{214D6CB9-0982-C52A-0E2C-8034D28E6B73}"/>
+              </a:ext>
+            </a:extLst>
+          </p:cNvPr>
+          <p:cNvSpPr txBox="1"/>
+          <p:nvPr/>
+        </p:nvSpPr>
+        <p:spPr>
+          <a:xfrm>
+            <a:off x="1208867" y="2696141"/>
+            <a:ext cx="9485995" cy="1754326"/>
+          </a:xfrm>
+          <a:prstGeom prst="rect">
+            <a:avLst/>
+          </a:prstGeom>
+          <a:noFill/>
+        </p:spPr>
+        <p:txBody>
+          <a:bodyPr wrap="none" rtlCol="0">
+            <a:spAutoFit/>
+          </a:bodyPr>
+          <a:lstStyle/>
+          <a:p>
+            <a:r>
+              <a:rPr lang="ru-RU" dirty="0"/>
+              <a:t>Визуал:</a:t>
+            </a:r>
+          </a:p>
+          <a:p>
+            <a:r>
+              <a:rPr lang="ru-RU" dirty="0"/>
+              <a:t>Скриншот интерфейса на </a:t>
+            </a:r>
+            <a:r>
+              <a:rPr lang="ru-RU" dirty="0" err="1"/>
+              <a:t>Streamlit</a:t>
+            </a:r>
+            <a:r>
+              <a:rPr lang="ru-RU" dirty="0"/>
+              <a:t> с примером ответа.</a:t>
+            </a:r>
+          </a:p>
+          <a:p>
+            <a:endParaRPr lang="ru-RU" dirty="0"/>
+          </a:p>
+          <a:p>
+            <a:r>
+              <a:rPr lang="ru-RU" dirty="0"/>
+              <a:t>Текст:</a:t>
+            </a:r>
+          </a:p>
+          <a:p>
+            <a:r>
+              <a:rPr lang="ru-RU" dirty="0"/>
+              <a:t>Генератор: </a:t>
+            </a:r>
+            <a:r>
+              <a:rPr lang="en-US" dirty="0"/>
+              <a:t>Qwen/Qwen2.5-1.5B-Instruct.</a:t>
+            </a:r>
+            <a:endParaRPr lang="ru-RU" dirty="0"/>
+          </a:p>
+          <a:p>
+            <a:r>
+              <a:rPr lang="ru-RU" dirty="0"/>
+              <a:t>Системный </a:t>
+            </a:r>
+            <a:r>
+              <a:rPr lang="ru-RU" dirty="0" err="1"/>
+              <a:t>промпт</a:t>
+            </a:r>
+            <a:r>
+              <a:rPr lang="ru-RU" dirty="0"/>
+              <a:t>: Роль научного ассистента с опорой </a:t>
+            </a:r>
+            <a:r>
+              <a:rPr lang="ru-RU" i="1" dirty="0"/>
+              <a:t>только</a:t>
+            </a:r>
+            <a:r>
+              <a:rPr lang="ru-RU" dirty="0"/>
+              <a:t> на предоставленный контекст.</a:t>
+            </a:r>
           </a:p>
         </p:txBody>
       </p:sp>
